--- a/blob_templates/award_nomination_onboarding_template.pptx
+++ b/blob_templates/award_nomination_onboarding_template.pptx
@@ -13,6 +13,7 @@
     <p:sldId id="258" r:id="rId4"/>
     <p:sldId id="259" r:id="rId5"/>
     <p:sldId id="260" r:id="rId6"/>
+    <p:sldId id="281" r:id="rId32"/>
     <p:sldId id="261" r:id="rId7"/>
     <p:sldId id="262" r:id="rId8"/>
     <p:sldId id="263" r:id="rId9"/>
@@ -21,6 +22,7 @@
     <p:sldId id="266" r:id="rId12"/>
     <p:sldId id="267" r:id="rId13"/>
     <p:sldId id="268" r:id="rId14"/>
+    <p:sldId id="280" r:id="rId31"/>
     <p:sldId id="269" r:id="rId15"/>
     <p:sldId id="270" r:id="rId16"/>
     <p:sldId id="271" r:id="rId17"/>
@@ -12015,7 +12017,7 @@
                 <a:ea typeface="Georgia" pitchFamily="34" charset="-122"/>
                 <a:cs typeface="Georgia" pitchFamily="34" charset="-120"/>
               </a:rPr>
-              <a:t>Next Steps</a:t>
+              <a:t>Pricing &amp; Tiers</a:t>
             </a:r>
             <a:endParaRPr lang="en-US" sz="1300" dirty="0"/>
           </a:p>
@@ -12053,6 +12055,169 @@
                 <a:latin typeface="Calibri" pitchFamily="34" charset="0"/>
                 <a:ea typeface="Calibri" pitchFamily="34" charset="-122"/>
                 <a:cs typeface="Calibri" pitchFamily="34" charset="-120"/>
+              </a:rPr>
+              <a:t>Starter, Professional &amp; Enterprise tiers</a:t>
+            </a:r>
+            <a:endParaRPr lang="en-US" sz="1000" dirty="0"/>
+          </a:p>
+        </p:txBody>
+      </p:sp>
+      <p:sp>
+        <p:nvSpPr>
+          <p:cNvPr id="32" name="Shape30"/>
+          <p:cNvSpPr/>
+          <p:nvPr/>
+        </p:nvSpPr>
+        <p:spPr>
+          <a:xfrm>
+            <a:off x="4846320" y="3611880"/>
+            <a:ext cx="4206240" cy="1005840"/>
+          </a:xfrm>
+          <a:prstGeom prst="rect">
+            <a:avLst/>
+          </a:prstGeom>
+          <a:solidFill>
+            <a:srgbClr val="FFFFFF"/>
+          </a:solidFill>
+          <a:ln/>
+          <a:effectLst>
+            <a:outerShdw blurRad="50800" dist="25400" dir="8100000" algn="bl" rotWithShape="0">
+              <a:srgbClr val="000000">
+                <a:alpha val="9000"/>
+              </a:srgbClr>
+            </a:outerShdw>
+          </a:effectLst>
+        </p:spPr>
+      </p:sp>
+      <p:sp>
+        <p:nvSpPr>
+          <p:cNvPr id="33" name="Shape31"/>
+          <p:cNvSpPr/>
+          <p:nvPr/>
+        </p:nvSpPr>
+        <p:spPr>
+          <a:xfrm>
+            <a:off x="4846320" y="3611880"/>
+            <a:ext cx="54864" cy="1005840"/>
+          </a:xfrm>
+          <a:prstGeom prst="rect">
+            <a:avLst/>
+          </a:prstGeom>
+          <a:solidFill>
+            <a:srgbClr val="00B4D8"/>
+          </a:solidFill>
+          <a:ln w="12700">
+            <a:solidFill>
+              <a:srgbClr val="00B4D8"/>
+            </a:solidFill>
+            <a:prstDash val="solid"/>
+          </a:ln>
+        </p:spPr>
+      </p:sp>
+      <p:sp>
+        <p:nvSpPr>
+          <p:cNvPr id="34" name="Text32"/>
+          <p:cNvSpPr/>
+          <p:nvPr/>
+        </p:nvSpPr>
+        <p:spPr>
+          <a:xfrm>
+            <a:off x="4983480" y="3685032"/>
+            <a:ext cx="411480" cy="320040"/>
+          </a:xfrm>
+          <a:prstGeom prst="rect">
+            <a:avLst/>
+          </a:prstGeom>
+          <a:noFill/>
+          <a:ln/>
+        </p:spPr>
+        <p:txBody>
+          <a:bodyPr wrap="square" lIns="0" tIns="0" rIns="0" bIns="0" rtlCol="0" anchor="ctr"/>
+          <a:lstStyle/>
+          <a:p>
+            <a:pPr marL="0" indent="0">
+              <a:buNone/>
+            </a:pPr>
+            <a:r>
+              <a:rPr lang="en-US" sz="2000" b="1" dirty="0">
+                <a:solidFill>
+                  <a:srgbClr val="00B4D8"/>
+                </a:solidFill>
+                <a:latin typeface="Arial Black" pitchFamily="34" charset="0"/>
+              </a:rPr>
+              <a:t>06</a:t>
+            </a:r>
+            <a:endParaRPr lang="en-US" sz="2000" dirty="0"/>
+          </a:p>
+        </p:txBody>
+      </p:sp>
+      <p:sp>
+        <p:nvSpPr>
+          <p:cNvPr id="35" name="Text33"/>
+          <p:cNvSpPr/>
+          <p:nvPr/>
+        </p:nvSpPr>
+        <p:spPr>
+          <a:xfrm>
+            <a:off x="5394960" y="3703320"/>
+            <a:ext cx="3566160" cy="274320"/>
+          </a:xfrm>
+          <a:prstGeom prst="rect">
+            <a:avLst/>
+          </a:prstGeom>
+          <a:noFill/>
+          <a:ln/>
+        </p:spPr>
+        <p:txBody>
+          <a:bodyPr wrap="square" lIns="0" tIns="0" rIns="0" bIns="0" rtlCol="0" anchor="ctr"/>
+          <a:lstStyle/>
+          <a:p>
+            <a:pPr marL="0" indent="0">
+              <a:buNone/>
+            </a:pPr>
+            <a:r>
+              <a:rPr lang="en-US" sz="1300" b="1" dirty="0">
+                <a:solidFill>
+                  <a:srgbClr val="0F2744"/>
+                </a:solidFill>
+                <a:latin typeface="Georgia" pitchFamily="34" charset="0"/>
+              </a:rPr>
+              <a:t>Next Steps</a:t>
+            </a:r>
+            <a:endParaRPr lang="en-US" sz="1300" dirty="0"/>
+          </a:p>
+        </p:txBody>
+      </p:sp>
+      <p:sp>
+        <p:nvSpPr>
+          <p:cNvPr id="36" name="Text34"/>
+          <p:cNvSpPr/>
+          <p:nvPr/>
+        </p:nvSpPr>
+        <p:spPr>
+          <a:xfrm>
+            <a:off x="4983480" y="4069080"/>
+            <a:ext cx="3977640" cy="457200"/>
+          </a:xfrm>
+          <a:prstGeom prst="rect">
+            <a:avLst/>
+          </a:prstGeom>
+          <a:noFill/>
+          <a:ln/>
+        </p:spPr>
+        <p:txBody>
+          <a:bodyPr wrap="square" lIns="0" tIns="0" rIns="0" bIns="0" rtlCol="0" anchor="ctr"/>
+          <a:lstStyle/>
+          <a:p>
+            <a:pPr marL="0" indent="0">
+              <a:buNone/>
+            </a:pPr>
+            <a:r>
+              <a:rPr lang="en-US" sz="1000" dirty="0">
+                <a:solidFill>
+                  <a:srgbClr val="1A3A5C"/>
+                </a:solidFill>
+                <a:latin typeface="Calibri" pitchFamily="34" charset="0"/>
               </a:rPr>
               <a:t>Pilot agreement, timeline, and sign-off</a:t>
             </a:r>
@@ -14070,6 +14235,1666 @@
           </a:p>
         </p:txBody>
       </p:sp>
+    </p:spTree>
+  </p:cSld>
+  <p:clrMapOvr>
+    <a:masterClrMapping/>
+  </p:clrMapOvr>
+</p:sld>
+</file>
+
+<file path=ppt/slides/slide25.xml><?xml version="1.0" encoding="utf-8"?>
+<p:sld xmlns:a="http://schemas.openxmlformats.org/drawingml/2006/main" xmlns:r="http://schemas.openxmlformats.org/officeDocument/2006/relationships" xmlns:p="http://schemas.openxmlformats.org/presentationml/2006/main">
+  <p:cSld name="Pricing and Tiers">
+    <p:bg>
+      <p:bgPr>
+        <a:solidFill>
+          <a:srgbClr val="F0F6FC"/>
+        </a:solidFill>
+        <a:effectLst/>
+      </p:bgPr>
+    </p:bg>
+    <p:spTree>
+      <p:nvGrpSpPr>
+        <p:cNvPr id="1" name=""/>
+        <p:cNvGrpSpPr/>
+        <p:nvPr/>
+      </p:nvGrpSpPr>
+      <p:grpSpPr>
+        <a:xfrm>
+          <a:off x="0" y="0"/>
+          <a:ext cx="0" cy="0"/>
+          <a:chOff x="0" y="0"/>
+          <a:chExt cx="0" cy="0"/>
+        </a:xfrm>
+      </p:grpSpPr>
+      <p:sp>
+        <p:nvSpPr>
+          <p:cNvPr id="2" name="HeaderBar"/>
+          <p:cNvSpPr/>
+          <p:nvPr/>
+        </p:nvSpPr>
+        <p:spPr>
+          <a:xfrm>
+            <a:off x="0" y="0"/>
+            <a:ext cx="9144000" cy="475488"/>
+          </a:xfrm>
+          <a:prstGeom prst="rect">
+            <a:avLst/>
+          </a:prstGeom>
+          <a:solidFill>
+            <a:srgbClr val="0F2744"/>
+          </a:solidFill>
+          <a:ln w="12700">
+            <a:solidFill>
+              <a:srgbClr val="0F2744"/>
+            </a:solidFill>
+            <a:prstDash val="solid"/>
+          </a:ln>
+        </p:spPr>
+      </p:sp>
+      <p:sp>
+        <p:nvSpPr>
+          <p:cNvPr id="3" name="HdrLeft"/>
+          <p:cNvSpPr/>
+          <p:nvPr/>
+        </p:nvSpPr>
+        <p:spPr>
+          <a:xfrm>
+            <a:off x="274320" y="0"/>
+            <a:ext cx="4114800" cy="475488"/>
+          </a:xfrm>
+          <a:prstGeom prst="rect">
+            <a:avLst/>
+          </a:prstGeom>
+          <a:noFill/>
+          <a:ln/>
+        </p:spPr>
+        <p:txBody>
+          <a:bodyPr wrap="square" lIns="0" tIns="0" rIns="0" bIns="0" rtlCol="0" anchor="ctr"/>
+          <a:lstStyle/>
+          <a:p>
+            <a:pPr marL="0" indent="0">
+              <a:buNone/>
+            </a:pPr>
+            <a:r>
+              <a:rPr lang="en-US" sz="1000" dirty="0">
+                <a:solidFill>
+                  <a:srgbClr val="D6E4F0"/>
+                </a:solidFill>
+                <a:latin typeface="Calibri" pitchFamily="34" charset="0"/>
+              </a:rPr>
+              <a:t>Provided by:  Terian Services</a:t>
+            </a:r>
+            <a:endParaRPr lang="en-US" sz="1000" dirty="0"/>
+          </a:p>
+        </p:txBody>
+      </p:sp>
+      <p:sp>
+        <p:nvSpPr>
+          <p:cNvPr id="4" name="HdrRight"/>
+          <p:cNvSpPr/>
+          <p:nvPr/>
+        </p:nvSpPr>
+        <p:spPr>
+          <a:xfrm>
+            <a:off x="4572000" y="0"/>
+            <a:ext cx="4297680" cy="475488"/>
+          </a:xfrm>
+          <a:prstGeom prst="rect">
+            <a:avLst/>
+          </a:prstGeom>
+          <a:noFill/>
+          <a:ln/>
+        </p:spPr>
+        <p:txBody>
+          <a:bodyPr wrap="square" lIns="0" tIns="0" rIns="0" bIns="0" rtlCol="0" anchor="ctr"/>
+          <a:lstStyle/>
+          <a:p>
+            <a:pPr marL="0" indent="0" algn="r">
+              <a:buNone/>
+            </a:pPr>
+            <a:r>
+              <a:rPr lang="en-US" sz="900" dirty="0">
+                <a:solidFill>
+                  <a:srgbClr val="00B4D8"/>
+                </a:solidFill>
+                <a:latin typeface="Calibri" pitchFamily="34" charset="0"/>
+              </a:rPr>
+              <a:t>Pricing &amp; Tiers</a:t>
+            </a:r>
+            <a:endParaRPr lang="en-US" sz="900" dirty="0"/>
+          </a:p>
+        </p:txBody>
+      </p:sp>
+      <p:sp>
+        <p:nvSpPr>
+          <p:cNvPr id="5" name="SlideTitle"/>
+          <p:cNvSpPr/>
+          <p:nvPr/>
+        </p:nvSpPr>
+        <p:spPr>
+          <a:xfrm>
+            <a:off x="457200" y="640080"/>
+            <a:ext cx="8229600" cy="502920"/>
+          </a:xfrm>
+          <a:prstGeom prst="rect">
+            <a:avLst/>
+          </a:prstGeom>
+          <a:noFill/>
+          <a:ln/>
+        </p:spPr>
+        <p:txBody>
+          <a:bodyPr wrap="square" lIns="0" tIns="0" rIns="0" bIns="0" rtlCol="0" anchor="ctr"/>
+          <a:lstStyle/>
+          <a:p>
+            <a:pPr marL="0" indent="0">
+              <a:buNone/>
+            </a:pPr>
+            <a:r>
+              <a:rPr lang="en-US" sz="3000" b="1" dirty="0">
+                <a:solidFill>
+                  <a:srgbClr val="0F2744"/>
+                </a:solidFill>
+                <a:latin typeface="Georgia" pitchFamily="34" charset="0"/>
+              </a:rPr>
+              <a:t>Pricing &amp; Tiers</a:t>
+            </a:r>
+            <a:endParaRPr lang="en-US" sz="3000" dirty="0"/>
+          </a:p>
+        </p:txBody>
+      </p:sp>
+      <p:sp>
+        <p:nvSpPr>
+          <p:cNvPr id="6" name="CyanLine"/>
+          <p:cNvSpPr/>
+          <p:nvPr/>
+        </p:nvSpPr>
+        <p:spPr>
+          <a:xfrm>
+            <a:off x="457200" y="1188720"/>
+            <a:ext cx="2286000" cy="36576"/>
+          </a:xfrm>
+          <a:prstGeom prst="rect">
+            <a:avLst/>
+          </a:prstGeom>
+          <a:solidFill>
+            <a:srgbClr val="00B4D8"/>
+          </a:solidFill>
+          <a:ln/>
+        </p:spPr>
+      </p:sp>
+      <p:sp>
+        <p:nvSpPr>
+          <p:cNvPr id="7" name="CardBg"/>
+          <p:cNvSpPr/>
+          <p:nvPr/>
+        </p:nvSpPr>
+        <p:spPr>
+          <a:xfrm>
+            <a:off x="274320" y="1280000"/>
+            <a:ext cx="2743200" cy="3700000"/>
+          </a:xfrm>
+          <a:prstGeom prst="rect">
+            <a:avLst/>
+          </a:prstGeom>
+          <a:solidFill>
+            <a:srgbClr val="FFFFFF"/>
+          </a:solidFill>
+          <a:ln/>
+          <a:effectLst>
+            <a:outerShdw blurRad="50800" dist="25400" dir="8100000" algn="bl" rotWithShape="0">
+              <a:srgbClr val="000000">
+                <a:alpha val="9000"/>
+              </a:srgbClr>
+            </a:outerShdw>
+          </a:effectLst>
+        </p:spPr>
+      </p:sp>
+      <p:sp>
+        <p:nvSpPr>
+          <p:cNvPr id="8" name="CardHdr"/>
+          <p:cNvSpPr/>
+          <p:nvPr/>
+        </p:nvSpPr>
+        <p:spPr>
+          <a:xfrm>
+            <a:off x="274320" y="1280000"/>
+            <a:ext cx="2743200" cy="640000"/>
+          </a:xfrm>
+          <a:prstGeom prst="rect">
+            <a:avLst/>
+          </a:prstGeom>
+          <a:solidFill>
+            <a:srgbClr val="1A3A5C"/>
+          </a:solidFill>
+          <a:ln w="12700">
+            <a:solidFill>
+              <a:srgbClr val="1A3A5C"/>
+            </a:solidFill>
+            <a:prstDash val="solid"/>
+          </a:ln>
+        </p:spPr>
+      </p:sp>
+      <p:sp>
+        <p:nvSpPr>
+          <p:cNvPr id="9" name="TierName"/>
+          <p:cNvSpPr/>
+          <p:nvPr/>
+        </p:nvSpPr>
+        <p:spPr>
+          <a:xfrm>
+            <a:off x="274320" y="1410000"/>
+            <a:ext cx="2743200" cy="380000"/>
+          </a:xfrm>
+          <a:prstGeom prst="rect">
+            <a:avLst/>
+          </a:prstGeom>
+          <a:noFill/>
+          <a:ln/>
+        </p:spPr>
+        <p:txBody>
+          <a:bodyPr wrap="square" lIns="0" tIns="0" rIns="0" bIns="0" rtlCol="0" anchor="ctr"/>
+          <a:lstStyle/>
+          <a:p>
+            <a:pPr marL="0" indent="0" algn="ctr">
+              <a:buNone/>
+            </a:pPr>
+            <a:r>
+              <a:rPr lang="en-US" sz="1600" b="1" dirty="0">
+                <a:solidFill>
+                  <a:srgbClr val="FFFFFF"/>
+                </a:solidFill>
+                <a:latin typeface="Georgia" pitchFamily="34" charset="0"/>
+              </a:rPr>
+              <a:t>Starter</a:t>
+            </a:r>
+            <a:endParaRPr lang="en-US" sz="1600" dirty="0"/>
+          </a:p>
+        </p:txBody>
+      </p:sp>
+      <p:sp>
+        <p:nvSpPr>
+          <p:cNvPr id="10" name="Price"/>
+          <p:cNvSpPr/>
+          <p:nvPr/>
+        </p:nvSpPr>
+        <p:spPr>
+          <a:xfrm>
+            <a:off x="274320" y="1980000"/>
+            <a:ext cx="2743200" cy="600000"/>
+          </a:xfrm>
+          <a:prstGeom prst="rect">
+            <a:avLst/>
+          </a:prstGeom>
+          <a:noFill/>
+          <a:ln/>
+        </p:spPr>
+        <p:txBody>
+          <a:bodyPr wrap="square" lIns="0" tIns="0" rIns="0" bIns="0" rtlCol="0" anchor="ctr"/>
+          <a:lstStyle/>
+          <a:p>
+            <a:pPr marL="0" indent="0" algn="ctr">
+              <a:buNone/>
+            </a:pPr>
+            <a:r>
+              <a:rPr lang="en-US" sz="3400" b="1" dirty="0">
+                <a:solidFill>
+                  <a:srgbClr val="0F2744"/>
+                </a:solidFill>
+                <a:latin typeface="Georgia" pitchFamily="34" charset="0"/>
+              </a:rPr>
+              <a:t>$189/mo</a:t>
+            </a:r>
+            <a:endParaRPr lang="en-US" sz="3400" dirty="0"/>
+          </a:p>
+        </p:txBody>
+      </p:sp>
+      <p:sp>
+        <p:nvSpPr>
+          <p:cNvPr id="11" name="Per"/>
+          <p:cNvSpPr/>
+          <p:nvPr/>
+        </p:nvSpPr>
+        <p:spPr>
+          <a:xfrm>
+            <a:off x="274320" y="2550000"/>
+            <a:ext cx="2743200" cy="230000"/>
+          </a:xfrm>
+          <a:prstGeom prst="rect">
+            <a:avLst/>
+          </a:prstGeom>
+          <a:noFill/>
+          <a:ln/>
+        </p:spPr>
+        <p:txBody>
+          <a:bodyPr wrap="square" lIns="0" tIns="0" rIns="0" bIns="0" rtlCol="0" anchor="ctr"/>
+          <a:lstStyle/>
+          <a:p>
+            <a:pPr marL="0" indent="0" algn="ctr">
+              <a:buNone/>
+            </a:pPr>
+            <a:r>
+              <a:rPr lang="en-US" sz="900" dirty="0">
+                <a:solidFill>
+                  <a:srgbClr val="1A3A5C"/>
+                </a:solidFill>
+                <a:latin typeface="Calibri" pitchFamily="34" charset="0"/>
+              </a:rPr>
+              <a:t>or $1,788/yr</a:t>
+            </a:r>
+            <a:endParaRPr lang="en-US" sz="900" dirty="0"/>
+          </a:p>
+        </p:txBody>
+      </p:sp>
+      <p:sp>
+        <p:nvSpPr>
+          <p:cNvPr id="12" name="Annual"/>
+          <p:cNvSpPr/>
+          <p:nvPr/>
+        </p:nvSpPr>
+        <p:spPr>
+          <a:xfrm>
+            <a:off x="274320" y="2810000"/>
+            <a:ext cx="2743200" cy="230000"/>
+          </a:xfrm>
+          <a:prstGeom prst="rect">
+            <a:avLst/>
+          </a:prstGeom>
+          <a:noFill/>
+          <a:ln/>
+        </p:spPr>
+        <p:txBody>
+          <a:bodyPr wrap="square" lIns="0" tIns="0" rIns="0" bIns="0" rtlCol="0" anchor="ctr"/>
+          <a:lstStyle/>
+          <a:p>
+            <a:pPr marL="0" indent="0" algn="ctr">
+              <a:buNone/>
+            </a:pPr>
+            <a:r>
+              <a:rPr lang="en-US" sz="850" i="1" dirty="0">
+                <a:solidFill>
+                  <a:srgbClr val="6B7280"/>
+                </a:solidFill>
+                <a:latin typeface="Calibri" pitchFamily="34" charset="0"/>
+              </a:rPr>
+              <a:t>($149/mo billed annually)</a:t>
+            </a:r>
+            <a:endParaRPr lang="en-US" sz="850" dirty="0"/>
+          </a:p>
+        </p:txBody>
+      </p:sp>
+      <p:sp>
+        <p:nvSpPr>
+          <p:cNvPr id="13" name="Div"/>
+          <p:cNvSpPr/>
+          <p:nvPr/>
+        </p:nvSpPr>
+        <p:spPr>
+          <a:xfrm>
+            <a:off x="384048" y="3090000"/>
+            <a:ext cx="2523744" cy="18288"/>
+          </a:xfrm>
+          <a:prstGeom prst="rect">
+            <a:avLst/>
+          </a:prstGeom>
+          <a:solidFill>
+            <a:srgbClr val="00B4D8"/>
+          </a:solidFill>
+          <a:ln/>
+        </p:spPr>
+      </p:sp>
+      <p:sp>
+        <p:nvSpPr>
+          <p:cNvPr id="14" name="Users"/>
+          <p:cNvSpPr/>
+          <p:nvPr/>
+        </p:nvSpPr>
+        <p:spPr>
+          <a:xfrm>
+            <a:off x="384048" y="3160000"/>
+            <a:ext cx="2523744" cy="280000"/>
+          </a:xfrm>
+          <a:prstGeom prst="rect">
+            <a:avLst/>
+          </a:prstGeom>
+          <a:noFill/>
+          <a:ln/>
+        </p:spPr>
+        <p:txBody>
+          <a:bodyPr wrap="square" lIns="0" tIns="0" rIns="0" bIns="0" rtlCol="0" anchor="ctr"/>
+          <a:lstStyle/>
+          <a:p>
+            <a:pPr marL="0" indent="0">
+              <a:buNone/>
+            </a:pPr>
+            <a:r>
+              <a:rPr lang="en-US" sz="1050" b="1" dirty="0">
+                <a:solidFill>
+                  <a:srgbClr val="0F2744"/>
+                </a:solidFill>
+                <a:latin typeface="Georgia" pitchFamily="34" charset="0"/>
+              </a:rPr>
+              <a:t>Up to 50 users</a:t>
+            </a:r>
+            <a:endParaRPr lang="en-US" sz="1050" dirty="0"/>
+          </a:p>
+        </p:txBody>
+      </p:sp>
+      <p:sp>
+        <p:nvSpPr>
+          <p:cNvPr id="15" name="Feat1"/>
+          <p:cNvSpPr/>
+          <p:nvPr/>
+        </p:nvSpPr>
+        <p:spPr>
+          <a:xfrm>
+            <a:off x="384048" y="3490000"/>
+            <a:ext cx="2523744" cy="250000"/>
+          </a:xfrm>
+          <a:prstGeom prst="rect">
+            <a:avLst/>
+          </a:prstGeom>
+          <a:noFill/>
+          <a:ln/>
+        </p:spPr>
+        <p:txBody>
+          <a:bodyPr wrap="square" lIns="0" tIns="0" rIns="0" bIns="0" rtlCol="0" anchor="ctr"/>
+          <a:lstStyle/>
+          <a:p>
+            <a:pPr marL="0" indent="0">
+              <a:buNone/>
+            </a:pPr>
+            <a:r>
+              <a:rPr lang="en-US" sz="900" dirty="0">
+                <a:solidFill>
+                  <a:srgbClr val="1A3A5C"/>
+                </a:solidFill>
+                <a:latin typeface="Calibri" pitchFamily="34" charset="0"/>
+              </a:rPr>
+              <a:t>· Core nomination workflow</a:t>
+            </a:r>
+            <a:endParaRPr lang="en-US" sz="900" dirty="0"/>
+          </a:p>
+        </p:txBody>
+      </p:sp>
+      <p:sp>
+        <p:nvSpPr>
+          <p:cNvPr id="16" name="Feat2"/>
+          <p:cNvSpPr/>
+          <p:nvPr/>
+        </p:nvSpPr>
+        <p:spPr>
+          <a:xfrm>
+            <a:off x="384048" y="3755000"/>
+            <a:ext cx="2523744" cy="250000"/>
+          </a:xfrm>
+          <a:prstGeom prst="rect">
+            <a:avLst/>
+          </a:prstGeom>
+          <a:noFill/>
+          <a:ln/>
+        </p:spPr>
+        <p:txBody>
+          <a:bodyPr wrap="square" lIns="0" tIns="0" rIns="0" bIns="0" rtlCol="0" anchor="ctr"/>
+          <a:lstStyle/>
+          <a:p>
+            <a:pPr marL="0" indent="0">
+              <a:buNone/>
+            </a:pPr>
+            <a:r>
+              <a:rPr lang="en-US" sz="900" dirty="0">
+                <a:solidFill>
+                  <a:srgbClr val="1A3A5C"/>
+                </a:solidFill>
+                <a:latin typeface="Calibri" pitchFamily="34" charset="0"/>
+              </a:rPr>
+              <a:t>· Fraud detection &amp; AI analytics</a:t>
+            </a:r>
+            <a:endParaRPr lang="en-US" sz="900" dirty="0"/>
+          </a:p>
+        </p:txBody>
+      </p:sp>
+      <p:sp>
+        <p:nvSpPr>
+          <p:cNvPr id="17" name="Feat3"/>
+          <p:cNvSpPr/>
+          <p:nvPr/>
+        </p:nvSpPr>
+        <p:spPr>
+          <a:xfrm>
+            <a:off x="384048" y="4020000"/>
+            <a:ext cx="2523744" cy="250000"/>
+          </a:xfrm>
+          <a:prstGeom prst="rect">
+            <a:avLst/>
+          </a:prstGeom>
+          <a:noFill/>
+          <a:ln/>
+        </p:spPr>
+        <p:txBody>
+          <a:bodyPr wrap="square" lIns="0" tIns="0" rIns="0" bIns="0" rtlCol="0" anchor="ctr"/>
+          <a:lstStyle/>
+          <a:p>
+            <a:pPr marL="0" indent="0">
+              <a:buNone/>
+            </a:pPr>
+            <a:r>
+              <a:rPr lang="en-US" sz="900" dirty="0">
+                <a:solidFill>
+                  <a:srgbClr val="1A3A5C"/>
+                </a:solidFill>
+                <a:latin typeface="Calibri" pitchFamily="34" charset="0"/>
+              </a:rPr>
+              <a:t>· Standard support (email)</a:t>
+            </a:r>
+            <a:endParaRPr lang="en-US" sz="900" dirty="0"/>
+          </a:p>
+        </p:txBody>
+      </p:sp>
+      <p:sp>
+        <p:nvSpPr>
+          <p:cNvPr id="18" name="Feat4"/>
+          <p:cNvSpPr/>
+          <p:nvPr/>
+        </p:nvSpPr>
+        <p:spPr>
+          <a:xfrm>
+            <a:off x="384048" y="4285000"/>
+            <a:ext cx="2523744" cy="250000"/>
+          </a:xfrm>
+          <a:prstGeom prst="rect">
+            <a:avLst/>
+          </a:prstGeom>
+          <a:noFill/>
+          <a:ln/>
+        </p:spPr>
+        <p:txBody>
+          <a:bodyPr wrap="square" lIns="0" tIns="0" rIns="0" bIns="0" rtlCol="0" anchor="ctr"/>
+          <a:lstStyle/>
+          <a:p>
+            <a:pPr marL="0" indent="0">
+              <a:buNone/>
+            </a:pPr>
+            <a:r>
+              <a:rPr lang="en-US" sz="900" dirty="0">
+                <a:solidFill>
+                  <a:srgbClr val="1A3A5C"/>
+                </a:solidFill>
+                <a:latin typeface="Calibri" pitchFamily="34" charset="0"/>
+              </a:rPr>
+              <a:t>· Single-region deployment</a:t>
+            </a:r>
+            <a:endParaRPr lang="en-US" sz="900" dirty="0"/>
+          </a:p>
+        </p:txBody>
+      </p:sp>
+      <p:sp>
+        <p:nvSpPr>
+          <p:cNvPr id="19" name="CardBg"/>
+          <p:cNvSpPr/>
+          <p:nvPr/>
+        </p:nvSpPr>
+        <p:spPr>
+          <a:xfrm>
+            <a:off x="3200400" y="1280000"/>
+            <a:ext cx="2743200" cy="3700000"/>
+          </a:xfrm>
+          <a:prstGeom prst="rect">
+            <a:avLst/>
+          </a:prstGeom>
+          <a:solidFill>
+            <a:srgbClr val="FFFFFF"/>
+          </a:solidFill>
+          <a:ln/>
+          <a:effectLst>
+            <a:outerShdw blurRad="50800" dist="25400" dir="8100000" algn="bl" rotWithShape="0">
+              <a:srgbClr val="000000">
+                <a:alpha val="9000"/>
+              </a:srgbClr>
+            </a:outerShdw>
+          </a:effectLst>
+        </p:spPr>
+      </p:sp>
+      <p:sp>
+        <p:nvSpPr>
+          <p:cNvPr id="20" name="CardHdr"/>
+          <p:cNvSpPr/>
+          <p:nvPr/>
+        </p:nvSpPr>
+        <p:spPr>
+          <a:xfrm>
+            <a:off x="3200400" y="1280000"/>
+            <a:ext cx="2743200" cy="640000"/>
+          </a:xfrm>
+          <a:prstGeom prst="rect">
+            <a:avLst/>
+          </a:prstGeom>
+          <a:solidFill>
+            <a:srgbClr val="00B4D8"/>
+          </a:solidFill>
+          <a:ln w="12700">
+            <a:solidFill>
+              <a:srgbClr val="00B4D8"/>
+            </a:solidFill>
+            <a:prstDash val="solid"/>
+          </a:ln>
+        </p:spPr>
+      </p:sp>
+      <p:sp>
+        <p:nvSpPr>
+          <p:cNvPr id="21" name="Badge"/>
+          <p:cNvSpPr/>
+          <p:nvPr/>
+        </p:nvSpPr>
+        <p:spPr>
+          <a:xfrm>
+            <a:off x="3200400" y="1370000"/>
+            <a:ext cx="2743200" cy="180000"/>
+          </a:xfrm>
+          <a:prstGeom prst="rect">
+            <a:avLst/>
+          </a:prstGeom>
+          <a:noFill/>
+          <a:ln/>
+        </p:spPr>
+        <p:txBody>
+          <a:bodyPr wrap="square" lIns="0" tIns="0" rIns="0" bIns="0" rtlCol="0" anchor="ctr"/>
+          <a:lstStyle/>
+          <a:p>
+            <a:pPr marL="0" indent="0" algn="ctr">
+              <a:buNone/>
+            </a:pPr>
+            <a:r>
+              <a:rPr lang="en-US" sz="700" b="1" dirty="0">
+                <a:solidFill>
+                  <a:srgbClr val="FFFFFF"/>
+                </a:solidFill>
+                <a:latin typeface="Calibri" pitchFamily="34" charset="0"/>
+              </a:rPr>
+              <a:t>★  MOST POPULAR  ★</a:t>
+            </a:r>
+            <a:endParaRPr lang="en-US" sz="700" dirty="0"/>
+          </a:p>
+        </p:txBody>
+      </p:sp>
+      <p:sp>
+        <p:nvSpPr>
+          <p:cNvPr id="22" name="TierName"/>
+          <p:cNvSpPr/>
+          <p:nvPr/>
+        </p:nvSpPr>
+        <p:spPr>
+          <a:xfrm>
+            <a:off x="3200400" y="1580000"/>
+            <a:ext cx="2743200" cy="340000"/>
+          </a:xfrm>
+          <a:prstGeom prst="rect">
+            <a:avLst/>
+          </a:prstGeom>
+          <a:noFill/>
+          <a:ln/>
+        </p:spPr>
+        <p:txBody>
+          <a:bodyPr wrap="square" lIns="0" tIns="0" rIns="0" bIns="0" rtlCol="0" anchor="ctr"/>
+          <a:lstStyle/>
+          <a:p>
+            <a:pPr marL="0" indent="0" algn="ctr">
+              <a:buNone/>
+            </a:pPr>
+            <a:r>
+              <a:rPr lang="en-US" sz="1600" b="1" dirty="0">
+                <a:solidFill>
+                  <a:srgbClr val="FFFFFF"/>
+                </a:solidFill>
+                <a:latin typeface="Georgia" pitchFamily="34" charset="0"/>
+              </a:rPr>
+              <a:t>Professional</a:t>
+            </a:r>
+            <a:endParaRPr lang="en-US" sz="1600" dirty="0"/>
+          </a:p>
+        </p:txBody>
+      </p:sp>
+      <p:sp>
+        <p:nvSpPr>
+          <p:cNvPr id="23" name="Price"/>
+          <p:cNvSpPr/>
+          <p:nvPr/>
+        </p:nvSpPr>
+        <p:spPr>
+          <a:xfrm>
+            <a:off x="3200400" y="1980000"/>
+            <a:ext cx="2743200" cy="600000"/>
+          </a:xfrm>
+          <a:prstGeom prst="rect">
+            <a:avLst/>
+          </a:prstGeom>
+          <a:noFill/>
+          <a:ln/>
+        </p:spPr>
+        <p:txBody>
+          <a:bodyPr wrap="square" lIns="0" tIns="0" rIns="0" bIns="0" rtlCol="0" anchor="ctr"/>
+          <a:lstStyle/>
+          <a:p>
+            <a:pPr marL="0" indent="0" algn="ctr">
+              <a:buNone/>
+            </a:pPr>
+            <a:r>
+              <a:rPr lang="en-US" sz="3400" b="1" dirty="0">
+                <a:solidFill>
+                  <a:srgbClr val="0F2744"/>
+                </a:solidFill>
+                <a:latin typeface="Georgia" pitchFamily="34" charset="0"/>
+              </a:rPr>
+              <a:t>$624/mo</a:t>
+            </a:r>
+            <a:endParaRPr lang="en-US" sz="3400" dirty="0"/>
+          </a:p>
+        </p:txBody>
+      </p:sp>
+      <p:sp>
+        <p:nvSpPr>
+          <p:cNvPr id="24" name="Per"/>
+          <p:cNvSpPr/>
+          <p:nvPr/>
+        </p:nvSpPr>
+        <p:spPr>
+          <a:xfrm>
+            <a:off x="3200400" y="2550000"/>
+            <a:ext cx="2743200" cy="230000"/>
+          </a:xfrm>
+          <a:prstGeom prst="rect">
+            <a:avLst/>
+          </a:prstGeom>
+          <a:noFill/>
+          <a:ln/>
+        </p:spPr>
+        <p:txBody>
+          <a:bodyPr wrap="square" lIns="0" tIns="0" rIns="0" bIns="0" rtlCol="0" anchor="ctr"/>
+          <a:lstStyle/>
+          <a:p>
+            <a:pPr marL="0" indent="0" algn="ctr">
+              <a:buNone/>
+            </a:pPr>
+            <a:r>
+              <a:rPr lang="en-US" sz="900" dirty="0">
+                <a:solidFill>
+                  <a:srgbClr val="1A3A5C"/>
+                </a:solidFill>
+                <a:latin typeface="Calibri" pitchFamily="34" charset="0"/>
+              </a:rPr>
+              <a:t>or $5,988/yr</a:t>
+            </a:r>
+            <a:endParaRPr lang="en-US" sz="900" dirty="0"/>
+          </a:p>
+        </p:txBody>
+      </p:sp>
+      <p:sp>
+        <p:nvSpPr>
+          <p:cNvPr id="25" name="Annual"/>
+          <p:cNvSpPr/>
+          <p:nvPr/>
+        </p:nvSpPr>
+        <p:spPr>
+          <a:xfrm>
+            <a:off x="3200400" y="2810000"/>
+            <a:ext cx="2743200" cy="230000"/>
+          </a:xfrm>
+          <a:prstGeom prst="rect">
+            <a:avLst/>
+          </a:prstGeom>
+          <a:noFill/>
+          <a:ln/>
+        </p:spPr>
+        <p:txBody>
+          <a:bodyPr wrap="square" lIns="0" tIns="0" rIns="0" bIns="0" rtlCol="0" anchor="ctr"/>
+          <a:lstStyle/>
+          <a:p>
+            <a:pPr marL="0" indent="0" algn="ctr">
+              <a:buNone/>
+            </a:pPr>
+            <a:r>
+              <a:rPr lang="en-US" sz="850" i="1" dirty="0">
+                <a:solidFill>
+                  <a:srgbClr val="6B7280"/>
+                </a:solidFill>
+                <a:latin typeface="Calibri" pitchFamily="34" charset="0"/>
+              </a:rPr>
+              <a:t>($499/mo billed annually)</a:t>
+            </a:r>
+            <a:endParaRPr lang="en-US" sz="850" dirty="0"/>
+          </a:p>
+        </p:txBody>
+      </p:sp>
+      <p:sp>
+        <p:nvSpPr>
+          <p:cNvPr id="26" name="Div"/>
+          <p:cNvSpPr/>
+          <p:nvPr/>
+        </p:nvSpPr>
+        <p:spPr>
+          <a:xfrm>
+            <a:off x="3310128" y="3090000"/>
+            <a:ext cx="2523744" cy="18288"/>
+          </a:xfrm>
+          <a:prstGeom prst="rect">
+            <a:avLst/>
+          </a:prstGeom>
+          <a:solidFill>
+            <a:srgbClr val="00B4D8"/>
+          </a:solidFill>
+          <a:ln/>
+        </p:spPr>
+      </p:sp>
+      <p:sp>
+        <p:nvSpPr>
+          <p:cNvPr id="27" name="Users"/>
+          <p:cNvSpPr/>
+          <p:nvPr/>
+        </p:nvSpPr>
+        <p:spPr>
+          <a:xfrm>
+            <a:off x="3310128" y="3160000"/>
+            <a:ext cx="2523744" cy="280000"/>
+          </a:xfrm>
+          <a:prstGeom prst="rect">
+            <a:avLst/>
+          </a:prstGeom>
+          <a:noFill/>
+          <a:ln/>
+        </p:spPr>
+        <p:txBody>
+          <a:bodyPr wrap="square" lIns="0" tIns="0" rIns="0" bIns="0" rtlCol="0" anchor="ctr"/>
+          <a:lstStyle/>
+          <a:p>
+            <a:pPr marL="0" indent="0">
+              <a:buNone/>
+            </a:pPr>
+            <a:r>
+              <a:rPr lang="en-US" sz="1050" b="1" dirty="0">
+                <a:solidFill>
+                  <a:srgbClr val="0F2744"/>
+                </a:solidFill>
+                <a:latin typeface="Georgia" pitchFamily="34" charset="0"/>
+              </a:rPr>
+              <a:t>50 – 500 users</a:t>
+            </a:r>
+            <a:endParaRPr lang="en-US" sz="1050" dirty="0"/>
+          </a:p>
+        </p:txBody>
+      </p:sp>
+      <p:sp>
+        <p:nvSpPr>
+          <p:cNvPr id="28" name="Feat1"/>
+          <p:cNvSpPr/>
+          <p:nvPr/>
+        </p:nvSpPr>
+        <p:spPr>
+          <a:xfrm>
+            <a:off x="3310128" y="3490000"/>
+            <a:ext cx="2523744" cy="250000"/>
+          </a:xfrm>
+          <a:prstGeom prst="rect">
+            <a:avLst/>
+          </a:prstGeom>
+          <a:noFill/>
+          <a:ln/>
+        </p:spPr>
+        <p:txBody>
+          <a:bodyPr wrap="square" lIns="0" tIns="0" rIns="0" bIns="0" rtlCol="0" anchor="ctr"/>
+          <a:lstStyle/>
+          <a:p>
+            <a:pPr marL="0" indent="0">
+              <a:buNone/>
+            </a:pPr>
+            <a:r>
+              <a:rPr lang="en-US" sz="900" dirty="0">
+                <a:solidFill>
+                  <a:srgbClr val="1A3A5C"/>
+                </a:solidFill>
+                <a:latin typeface="Calibri" pitchFamily="34" charset="0"/>
+              </a:rPr>
+              <a:t>· Full workflow + advanced AI analytics</a:t>
+            </a:r>
+            <a:endParaRPr lang="en-US" sz="900" dirty="0"/>
+          </a:p>
+        </p:txBody>
+      </p:sp>
+      <p:sp>
+        <p:nvSpPr>
+          <p:cNvPr id="29" name="Feat2"/>
+          <p:cNvSpPr/>
+          <p:nvPr/>
+        </p:nvSpPr>
+        <p:spPr>
+          <a:xfrm>
+            <a:off x="3310128" y="3755000"/>
+            <a:ext cx="2523744" cy="250000"/>
+          </a:xfrm>
+          <a:prstGeom prst="rect">
+            <a:avLst/>
+          </a:prstGeom>
+          <a:noFill/>
+          <a:ln/>
+        </p:spPr>
+        <p:txBody>
+          <a:bodyPr wrap="square" lIns="0" tIns="0" rIns="0" bIns="0" rtlCol="0" anchor="ctr"/>
+          <a:lstStyle/>
+          <a:p>
+            <a:pPr marL="0" indent="0">
+              <a:buNone/>
+            </a:pPr>
+            <a:r>
+              <a:rPr lang="en-US" sz="900" dirty="0">
+                <a:solidFill>
+                  <a:srgbClr val="1A3A5C"/>
+                </a:solidFill>
+                <a:latin typeface="Calibri" pitchFamily="34" charset="0"/>
+              </a:rPr>
+              <a:t>· Multi-region failover</a:t>
+            </a:r>
+            <a:endParaRPr lang="en-US" sz="900" dirty="0"/>
+          </a:p>
+        </p:txBody>
+      </p:sp>
+      <p:sp>
+        <p:nvSpPr>
+          <p:cNvPr id="30" name="Feat3"/>
+          <p:cNvSpPr/>
+          <p:nvPr/>
+        </p:nvSpPr>
+        <p:spPr>
+          <a:xfrm>
+            <a:off x="3310128" y="4020000"/>
+            <a:ext cx="2523744" cy="250000"/>
+          </a:xfrm>
+          <a:prstGeom prst="rect">
+            <a:avLst/>
+          </a:prstGeom>
+          <a:noFill/>
+          <a:ln/>
+        </p:spPr>
+        <p:txBody>
+          <a:bodyPr wrap="square" lIns="0" tIns="0" rIns="0" bIns="0" rtlCol="0" anchor="ctr"/>
+          <a:lstStyle/>
+          <a:p>
+            <a:pPr marL="0" indent="0">
+              <a:buNone/>
+            </a:pPr>
+            <a:r>
+              <a:rPr lang="en-US" sz="900" dirty="0">
+                <a:solidFill>
+                  <a:srgbClr val="1A3A5C"/>
+                </a:solidFill>
+                <a:latin typeface="Calibri" pitchFamily="34" charset="0"/>
+              </a:rPr>
+              <a:t>· Priority support (24-hour response)</a:t>
+            </a:r>
+            <a:endParaRPr lang="en-US" sz="900" dirty="0"/>
+          </a:p>
+        </p:txBody>
+      </p:sp>
+      <p:sp>
+        <p:nvSpPr>
+          <p:cNvPr id="31" name="Feat4"/>
+          <p:cNvSpPr/>
+          <p:nvPr/>
+        </p:nvSpPr>
+        <p:spPr>
+          <a:xfrm>
+            <a:off x="3310128" y="4285000"/>
+            <a:ext cx="2523744" cy="250000"/>
+          </a:xfrm>
+          <a:prstGeom prst="rect">
+            <a:avLst/>
+          </a:prstGeom>
+          <a:noFill/>
+          <a:ln/>
+        </p:spPr>
+        <p:txBody>
+          <a:bodyPr wrap="square" lIns="0" tIns="0" rIns="0" bIns="0" rtlCol="0" anchor="ctr"/>
+          <a:lstStyle/>
+          <a:p>
+            <a:pPr marL="0" indent="0">
+              <a:buNone/>
+            </a:pPr>
+            <a:r>
+              <a:rPr lang="en-US" sz="900" dirty="0">
+                <a:solidFill>
+                  <a:srgbClr val="1A3A5C"/>
+                </a:solidFill>
+                <a:latin typeface="Calibri" pitchFamily="34" charset="0"/>
+              </a:rPr>
+              <a:t>· Advanced reporting &amp; audit logs</a:t>
+            </a:r>
+            <a:endParaRPr lang="en-US" sz="900" dirty="0"/>
+          </a:p>
+        </p:txBody>
+      </p:sp>
+      <p:sp>
+        <p:nvSpPr>
+          <p:cNvPr id="32" name="CardBg"/>
+          <p:cNvSpPr/>
+          <p:nvPr/>
+        </p:nvSpPr>
+        <p:spPr>
+          <a:xfrm>
+            <a:off x="6126480" y="1280000"/>
+            <a:ext cx="2743200" cy="3700000"/>
+          </a:xfrm>
+          <a:prstGeom prst="rect">
+            <a:avLst/>
+          </a:prstGeom>
+          <a:solidFill>
+            <a:srgbClr val="FFFFFF"/>
+          </a:solidFill>
+          <a:ln/>
+          <a:effectLst>
+            <a:outerShdw blurRad="50800" dist="25400" dir="8100000" algn="bl" rotWithShape="0">
+              <a:srgbClr val="000000">
+                <a:alpha val="9000"/>
+              </a:srgbClr>
+            </a:outerShdw>
+          </a:effectLst>
+        </p:spPr>
+      </p:sp>
+      <p:sp>
+        <p:nvSpPr>
+          <p:cNvPr id="33" name="CardHdr"/>
+          <p:cNvSpPr/>
+          <p:nvPr/>
+        </p:nvSpPr>
+        <p:spPr>
+          <a:xfrm>
+            <a:off x="6126480" y="1280000"/>
+            <a:ext cx="2743200" cy="640000"/>
+          </a:xfrm>
+          <a:prstGeom prst="rect">
+            <a:avLst/>
+          </a:prstGeom>
+          <a:solidFill>
+            <a:srgbClr val="1A3A5C"/>
+          </a:solidFill>
+          <a:ln w="12700">
+            <a:solidFill>
+              <a:srgbClr val="1A3A5C"/>
+            </a:solidFill>
+            <a:prstDash val="solid"/>
+          </a:ln>
+        </p:spPr>
+      </p:sp>
+      <p:sp>
+        <p:nvSpPr>
+          <p:cNvPr id="34" name="TierName"/>
+          <p:cNvSpPr/>
+          <p:nvPr/>
+        </p:nvSpPr>
+        <p:spPr>
+          <a:xfrm>
+            <a:off x="6126480" y="1410000"/>
+            <a:ext cx="2743200" cy="380000"/>
+          </a:xfrm>
+          <a:prstGeom prst="rect">
+            <a:avLst/>
+          </a:prstGeom>
+          <a:noFill/>
+          <a:ln/>
+        </p:spPr>
+        <p:txBody>
+          <a:bodyPr wrap="square" lIns="0" tIns="0" rIns="0" bIns="0" rtlCol="0" anchor="ctr"/>
+          <a:lstStyle/>
+          <a:p>
+            <a:pPr marL="0" indent="0" algn="ctr">
+              <a:buNone/>
+            </a:pPr>
+            <a:r>
+              <a:rPr lang="en-US" sz="1600" b="1" dirty="0">
+                <a:solidFill>
+                  <a:srgbClr val="FFFFFF"/>
+                </a:solidFill>
+                <a:latin typeface="Georgia" pitchFamily="34" charset="0"/>
+              </a:rPr>
+              <a:t>Enterprise</a:t>
+            </a:r>
+            <a:endParaRPr lang="en-US" sz="1600" dirty="0"/>
+          </a:p>
+        </p:txBody>
+      </p:sp>
+      <p:sp>
+        <p:nvSpPr>
+          <p:cNvPr id="35" name="Price"/>
+          <p:cNvSpPr/>
+          <p:nvPr/>
+        </p:nvSpPr>
+        <p:spPr>
+          <a:xfrm>
+            <a:off x="6126480" y="1980000"/>
+            <a:ext cx="2743200" cy="600000"/>
+          </a:xfrm>
+          <a:prstGeom prst="rect">
+            <a:avLst/>
+          </a:prstGeom>
+          <a:noFill/>
+          <a:ln/>
+        </p:spPr>
+        <p:txBody>
+          <a:bodyPr wrap="square" lIns="0" tIns="0" rIns="0" bIns="0" rtlCol="0" anchor="ctr"/>
+          <a:lstStyle/>
+          <a:p>
+            <a:pPr marL="0" indent="0" algn="ctr">
+              <a:buNone/>
+            </a:pPr>
+            <a:r>
+              <a:rPr lang="en-US" sz="3400" b="1" dirty="0">
+                <a:solidFill>
+                  <a:srgbClr val="0F2744"/>
+                </a:solidFill>
+                <a:latin typeface="Georgia" pitchFamily="34" charset="0"/>
+              </a:rPr>
+              <a:t>Custom</a:t>
+            </a:r>
+            <a:endParaRPr lang="en-US" sz="3400" dirty="0"/>
+          </a:p>
+        </p:txBody>
+      </p:sp>
+      <p:sp>
+        <p:nvSpPr>
+          <p:cNvPr id="36" name="Per"/>
+          <p:cNvSpPr/>
+          <p:nvPr/>
+        </p:nvSpPr>
+        <p:spPr>
+          <a:xfrm>
+            <a:off x="6126480" y="2550000"/>
+            <a:ext cx="2743200" cy="230000"/>
+          </a:xfrm>
+          <a:prstGeom prst="rect">
+            <a:avLst/>
+          </a:prstGeom>
+          <a:noFill/>
+          <a:ln/>
+        </p:spPr>
+        <p:txBody>
+          <a:bodyPr wrap="square" lIns="0" tIns="0" rIns="0" bIns="0" rtlCol="0" anchor="ctr"/>
+          <a:lstStyle/>
+          <a:p>
+            <a:pPr marL="0" indent="0" algn="ctr">
+              <a:buNone/>
+            </a:pPr>
+            <a:r>
+              <a:rPr lang="en-US" sz="900" dirty="0">
+                <a:solidFill>
+                  <a:srgbClr val="1A3A5C"/>
+                </a:solidFill>
+                <a:latin typeface="Calibri" pitchFamily="34" charset="0"/>
+              </a:rPr>
+              <a:t>pricing</a:t>
+            </a:r>
+            <a:endParaRPr lang="en-US" sz="900" dirty="0"/>
+          </a:p>
+        </p:txBody>
+      </p:sp>
+      <p:sp>
+        <p:nvSpPr>
+          <p:cNvPr id="37" name="Annual"/>
+          <p:cNvSpPr/>
+          <p:nvPr/>
+        </p:nvSpPr>
+        <p:spPr>
+          <a:xfrm>
+            <a:off x="6126480" y="2810000"/>
+            <a:ext cx="2743200" cy="230000"/>
+          </a:xfrm>
+          <a:prstGeom prst="rect">
+            <a:avLst/>
+          </a:prstGeom>
+          <a:noFill/>
+          <a:ln/>
+        </p:spPr>
+        <p:txBody>
+          <a:bodyPr wrap="square" lIns="0" tIns="0" rIns="0" bIns="0" rtlCol="0" anchor="ctr"/>
+          <a:lstStyle/>
+          <a:p>
+            <a:pPr marL="0" indent="0" algn="ctr">
+              <a:buNone/>
+            </a:pPr>
+            <a:r>
+              <a:rPr lang="en-US" sz="850" i="1" dirty="0">
+                <a:solidFill>
+                  <a:srgbClr val="6B7280"/>
+                </a:solidFill>
+                <a:latin typeface="Calibri" pitchFamily="34" charset="0"/>
+              </a:rPr>
+              <a:t>Contact sales for a quote</a:t>
+            </a:r>
+            <a:endParaRPr lang="en-US" sz="850" dirty="0"/>
+          </a:p>
+        </p:txBody>
+      </p:sp>
+      <p:sp>
+        <p:nvSpPr>
+          <p:cNvPr id="38" name="Div"/>
+          <p:cNvSpPr/>
+          <p:nvPr/>
+        </p:nvSpPr>
+        <p:spPr>
+          <a:xfrm>
+            <a:off x="6236208" y="3090000"/>
+            <a:ext cx="2523744" cy="18288"/>
+          </a:xfrm>
+          <a:prstGeom prst="rect">
+            <a:avLst/>
+          </a:prstGeom>
+          <a:solidFill>
+            <a:srgbClr val="00B4D8"/>
+          </a:solidFill>
+          <a:ln/>
+        </p:spPr>
+      </p:sp>
+      <p:sp>
+        <p:nvSpPr>
+          <p:cNvPr id="39" name="Users"/>
+          <p:cNvSpPr/>
+          <p:nvPr/>
+        </p:nvSpPr>
+        <p:spPr>
+          <a:xfrm>
+            <a:off x="6236208" y="3160000"/>
+            <a:ext cx="2523744" cy="280000"/>
+          </a:xfrm>
+          <a:prstGeom prst="rect">
+            <a:avLst/>
+          </a:prstGeom>
+          <a:noFill/>
+          <a:ln/>
+        </p:spPr>
+        <p:txBody>
+          <a:bodyPr wrap="square" lIns="0" tIns="0" rIns="0" bIns="0" rtlCol="0" anchor="ctr"/>
+          <a:lstStyle/>
+          <a:p>
+            <a:pPr marL="0" indent="0">
+              <a:buNone/>
+            </a:pPr>
+            <a:r>
+              <a:rPr lang="en-US" sz="1050" b="1" dirty="0">
+                <a:solidFill>
+                  <a:srgbClr val="0F2744"/>
+                </a:solidFill>
+                <a:latin typeface="Georgia" pitchFamily="34" charset="0"/>
+              </a:rPr>
+              <a:t>500+ users</a:t>
+            </a:r>
+            <a:endParaRPr lang="en-US" sz="1050" dirty="0"/>
+          </a:p>
+        </p:txBody>
+      </p:sp>
+      <p:sp>
+        <p:nvSpPr>
+          <p:cNvPr id="40" name="Feat1"/>
+          <p:cNvSpPr/>
+          <p:nvPr/>
+        </p:nvSpPr>
+        <p:spPr>
+          <a:xfrm>
+            <a:off x="6236208" y="3490000"/>
+            <a:ext cx="2523744" cy="250000"/>
+          </a:xfrm>
+          <a:prstGeom prst="rect">
+            <a:avLst/>
+          </a:prstGeom>
+          <a:noFill/>
+          <a:ln/>
+        </p:spPr>
+        <p:txBody>
+          <a:bodyPr wrap="square" lIns="0" tIns="0" rIns="0" bIns="0" rtlCol="0" anchor="ctr"/>
+          <a:lstStyle/>
+          <a:p>
+            <a:pPr marL="0" indent="0">
+              <a:buNone/>
+            </a:pPr>
+            <a:r>
+              <a:rPr lang="en-US" sz="900" dirty="0">
+                <a:solidFill>
+                  <a:srgbClr val="1A3A5C"/>
+                </a:solidFill>
+                <a:latin typeface="Calibri" pitchFamily="34" charset="0"/>
+              </a:rPr>
+              <a:t>· Custom implementation &amp; config</a:t>
+            </a:r>
+            <a:endParaRPr lang="en-US" sz="900" dirty="0"/>
+          </a:p>
+        </p:txBody>
+      </p:sp>
+      <p:sp>
+        <p:nvSpPr>
+          <p:cNvPr id="41" name="Feat2"/>
+          <p:cNvSpPr/>
+          <p:nvPr/>
+        </p:nvSpPr>
+        <p:spPr>
+          <a:xfrm>
+            <a:off x="6236208" y="3755000"/>
+            <a:ext cx="2523744" cy="250000"/>
+          </a:xfrm>
+          <a:prstGeom prst="rect">
+            <a:avLst/>
+          </a:prstGeom>
+          <a:noFill/>
+          <a:ln/>
+        </p:spPr>
+        <p:txBody>
+          <a:bodyPr wrap="square" lIns="0" tIns="0" rIns="0" bIns="0" rtlCol="0" anchor="ctr"/>
+          <a:lstStyle/>
+          <a:p>
+            <a:pPr marL="0" indent="0">
+              <a:buNone/>
+            </a:pPr>
+            <a:r>
+              <a:rPr lang="en-US" sz="900" dirty="0">
+                <a:solidFill>
+                  <a:srgbClr val="1A3A5C"/>
+                </a:solidFill>
+                <a:latin typeface="Calibri" pitchFamily="34" charset="0"/>
+              </a:rPr>
+              <a:t>· Dedicated support team</a:t>
+            </a:r>
+            <a:endParaRPr lang="en-US" sz="900" dirty="0"/>
+          </a:p>
+        </p:txBody>
+      </p:sp>
+      <p:sp>
+        <p:nvSpPr>
+          <p:cNvPr id="42" name="Feat3"/>
+          <p:cNvSpPr/>
+          <p:nvPr/>
+        </p:nvSpPr>
+        <p:spPr>
+          <a:xfrm>
+            <a:off x="6236208" y="4020000"/>
+            <a:ext cx="2523744" cy="250000"/>
+          </a:xfrm>
+          <a:prstGeom prst="rect">
+            <a:avLst/>
+          </a:prstGeom>
+          <a:noFill/>
+          <a:ln/>
+        </p:spPr>
+        <p:txBody>
+          <a:bodyPr wrap="square" lIns="0" tIns="0" rIns="0" bIns="0" rtlCol="0" anchor="ctr"/>
+          <a:lstStyle/>
+          <a:p>
+            <a:pPr marL="0" indent="0">
+              <a:buNone/>
+            </a:pPr>
+            <a:r>
+              <a:rPr lang="en-US" sz="900" dirty="0">
+                <a:solidFill>
+                  <a:srgbClr val="1A3A5C"/>
+                </a:solidFill>
+                <a:latin typeface="Calibri" pitchFamily="34" charset="0"/>
+              </a:rPr>
+              <a:t>· Custom analytics &amp; integrations</a:t>
+            </a:r>
+            <a:endParaRPr lang="en-US" sz="900" dirty="0"/>
+          </a:p>
+        </p:txBody>
+      </p:sp>
+      <p:sp>
+        <p:nvSpPr>
+          <p:cNvPr id="43" name="Feat4"/>
+          <p:cNvSpPr/>
+          <p:nvPr/>
+        </p:nvSpPr>
+        <p:spPr>
+          <a:xfrm>
+            <a:off x="6236208" y="4285000"/>
+            <a:ext cx="2523744" cy="250000"/>
+          </a:xfrm>
+          <a:prstGeom prst="rect">
+            <a:avLst/>
+          </a:prstGeom>
+          <a:noFill/>
+          <a:ln/>
+        </p:spPr>
+        <p:txBody>
+          <a:bodyPr wrap="square" lIns="0" tIns="0" rIns="0" bIns="0" rtlCol="0" anchor="ctr"/>
+          <a:lstStyle/>
+          <a:p>
+            <a:pPr marL="0" indent="0">
+              <a:buNone/>
+            </a:pPr>
+            <a:r>
+              <a:rPr lang="en-US" sz="900" dirty="0">
+                <a:solidFill>
+                  <a:srgbClr val="1A3A5C"/>
+                </a:solidFill>
+                <a:latin typeface="Calibri" pitchFamily="34" charset="0"/>
+              </a:rPr>
+              <a:t>· Multi-region + contractual SLA</a:t>
+            </a:r>
+            <a:endParaRPr lang="en-US" sz="900" dirty="0"/>
+          </a:p>
+        </p:txBody>
+      </p:sp>
+    </p:spTree>
+  </p:cSld>
+  <p:clrMapOvr>
+    <a:masterClrMapping/>
+  </p:clrMapOvr>
+</p:sld>
+</file>
+
+<file path=ppt/slides/slide26.xml><?xml version="1.0" encoding="utf-8"?>
+<p:sld xmlns:a="http://schemas.openxmlformats.org/drawingml/2006/main" xmlns:r="http://schemas.openxmlformats.org/officeDocument/2006/relationships" xmlns:p="http://schemas.openxmlformats.org/presentationml/2006/main">
+  <p:cSld name="Fraud Detection Workflow">
+    <p:bg>
+      <p:bgPr>
+        <a:solidFill>
+          <a:srgbClr val="F0F6FC"/>
+        </a:solidFill>
+        <a:effectLst/>
+      </p:bgPr>
+    </p:bg>
+    <p:spTree>
+      <p:nvGrpSpPr>
+        <p:cNvPr id="1" name=""/>
+        <p:cNvGrpSpPr/>
+        <p:nvPr/>
+      </p:nvGrpSpPr>
+      <p:grpSpPr>
+        <a:xfrm>
+          <a:off x="0" y="0"/>
+          <a:ext cx="0" cy="0"/>
+          <a:chOff x="0" y="0"/>
+          <a:chExt cx="0" cy="0"/>
+        </a:xfrm>
+      </p:grpSpPr>
+      <!-- Header bar -->
+      <p:sp>
+        <p:nvSpPr>
+          <p:cNvPr id="2" name="HeaderBar"/>
+          <p:cNvSpPr/>
+          <p:nvPr/>
+        </p:nvSpPr>
+        <p:spPr>
+          <a:xfrm>
+            <a:off x="0" y="0"/>
+            <a:ext cx="9144000" cy="475488"/>
+          </a:xfrm>
+          <a:prstGeom prst="rect">
+            <a:avLst/>
+          </a:prstGeom>
+          <a:solidFill>
+            <a:srgbClr val="0F2744"/>
+          </a:solidFill>
+          <a:ln w="12700">
+            <a:solidFill>
+              <a:srgbClr val="0F2744"/>
+            </a:solidFill>
+            <a:prstDash val="solid"/>
+          </a:ln>
+        </p:spPr>
+      </p:sp>
+      <!-- Header left: section label -->
+      <p:sp>
+        <p:nvSpPr>
+          <p:cNvPr id="3" name="HdrLeft"/>
+          <p:cNvSpPr/>
+          <p:nvPr/>
+        </p:nvSpPr>
+        <p:spPr>
+          <a:xfrm>
+            <a:off x="274320" y="0"/>
+            <a:ext cx="4114800" cy="475488"/>
+          </a:xfrm>
+          <a:prstGeom prst="rect">
+            <a:avLst/>
+          </a:prstGeom>
+          <a:noFill/>
+          <a:ln/>
+        </p:spPr>
+        <p:txBody>
+          <a:bodyPr wrap="square" lIns="0" tIns="0" rIns="0" bIns="0" rtlCol="0" anchor="ctr"/>
+          <a:lstStyle/>
+          <a:p>
+            <a:pPr marL="0" indent="0">
+              <a:buNone/>
+            </a:pPr>
+            <a:r>
+              <a:rPr lang="en-US" sz="1000" dirty="0">
+                <a:solidFill>
+                  <a:srgbClr val="D6E4F0"/>
+                </a:solidFill>
+                <a:latin typeface="Calibri" pitchFamily="34" charset="0"/>
+              </a:rPr>
+              <a:t>Provided by:  Terian Services</a:t>
+            </a:r>
+            <a:endParaRPr lang="en-US" sz="1000" dirty="0"/>
+          </a:p>
+        </p:txBody>
+      </p:sp>
+      <!-- Header right: page label -->
+      <p:sp>
+        <p:nvSpPr>
+          <p:cNvPr id="4" name="HdrRight"/>
+          <p:cNvSpPr/>
+          <p:nvPr/>
+        </p:nvSpPr>
+        <p:spPr>
+          <a:xfrm>
+            <a:off x="4572000" y="0"/>
+            <a:ext cx="4297680" cy="475488"/>
+          </a:xfrm>
+          <a:prstGeom prst="rect">
+            <a:avLst/>
+          </a:prstGeom>
+          <a:noFill/>
+          <a:ln/>
+        </p:spPr>
+        <p:txBody>
+          <a:bodyPr wrap="square" lIns="0" tIns="0" rIns="0" bIns="0" rtlCol="0" anchor="ctr"/>
+          <a:lstStyle/>
+          <a:p>
+            <a:pPr marL="0" indent="0" algn="r">
+              <a:buNone/>
+            </a:pPr>
+            <a:r>
+              <a:rPr lang="en-US" sz="900" dirty="0">
+                <a:solidFill>
+                  <a:srgbClr val="00B4D8"/>
+                </a:solidFill>
+                <a:latin typeface="Calibri" pitchFamily="34" charset="0"/>
+              </a:rPr>
+              <a:t>Platform Capabilities</a:t>
+            </a:r>
+            <a:endParaRPr lang="en-US" sz="900" dirty="0"/>
+          </a:p>
+        </p:txBody>
+      </p:sp>
+      <!-- Slide title -->
+      <p:sp>
+        <p:nvSpPr>
+          <p:cNvPr id="5" name="SlideTitle"/>
+          <p:cNvSpPr/>
+          <p:nvPr/>
+        </p:nvSpPr>
+        <p:spPr>
+          <a:xfrm>
+            <a:off x="457200" y="548640"/>
+            <a:ext cx="8229600" cy="457200"/>
+          </a:xfrm>
+          <a:prstGeom prst="rect">
+            <a:avLst/>
+          </a:prstGeom>
+          <a:noFill/>
+          <a:ln/>
+        </p:spPr>
+        <p:txBody>
+          <a:bodyPr wrap="square" lIns="0" tIns="0" rIns="0" bIns="0" rtlCol="0" anchor="ctr"/>
+          <a:lstStyle/>
+          <a:p>
+            <a:pPr marL="0" indent="0">
+              <a:buNone/>
+            </a:pPr>
+            <a:r>
+              <a:rPr lang="en-US" sz="2400" b="1" dirty="0">
+                <a:solidFill>
+                  <a:srgbClr val="0F2744"/>
+                </a:solidFill>
+                <a:latin typeface="Georgia" pitchFamily="34" charset="0"/>
+              </a:rPr>
+              <a:t>Fraud Detection — Review Workflow</a:t>
+            </a:r>
+            <a:endParaRPr lang="en-US" sz="2400" dirty="0"/>
+          </a:p>
+        </p:txBody>
+      </p:sp>
+      <!-- Cyan accent line -->
+      <p:sp>
+        <p:nvSpPr>
+          <p:cNvPr id="6" name="CyanLine"/>
+          <p:cNvSpPr/>
+          <p:nvPr/>
+        </p:nvSpPr>
+        <p:spPr>
+          <a:xfrm>
+            <a:off x="457200" y="1042480"/>
+            <a:ext cx="2286000" cy="36576"/>
+          </a:xfrm>
+          <a:prstGeom prst="rect">
+            <a:avLst/>
+          </a:prstGeom>
+          <a:solidFill>
+            <a:srgbClr val="00B4D8"/>
+          </a:solidFill>
+          <a:ln/>
+        </p:spPr>
+      </p:sp>
+      <!-- Workflow diagram image -->
+      <p:pic>
+        <p:nvPicPr>
+          <p:cNvPr id="7" name="WorkflowDiagram"/>
+          <p:cNvPicPr>
+            <a:picLocks noChangeAspect="1"/>
+          </p:cNvPicPr>
+          <p:nvPr/>
+        </p:nvPicPr>
+        <p:blipFill>
+          <a:blip r:embed="rId2"/>
+          <a:stretch>
+            <a:fillRect/>
+          </a:stretch>
+        </p:blipFill>
+        <p:spPr>
+          <a:xfrm>
+            <a:off x="2024830" y="1240000"/>
+            <a:ext cx="5094340" cy="3600000"/>
+          </a:xfrm>
+          <a:prstGeom prst="rect">
+            <a:avLst/>
+          </a:prstGeom>
+        </p:spPr>
+      </p:pic>
     </p:spTree>
   </p:cSld>
   <p:clrMapOvr>

--- a/blob_templates/award_nomination_onboarding_template.pptx
+++ b/blob_templates/award_nomination_onboarding_template.pptx
@@ -14,6 +14,8 @@
     <p:sldId id="259" r:id="rId5"/>
     <p:sldId id="260" r:id="rId6"/>
     <p:sldId id="281" r:id="rId32"/>
+    <p:sldId id="282" r:id="rId33"/>
+    <p:sldId id="283" r:id="rId34"/>
     <p:sldId id="261" r:id="rId7"/>
     <p:sldId id="262" r:id="rId8"/>
     <p:sldId id="263" r:id="rId9"/>
@@ -15709,7 +15711,6 @@
           <a:chExt cx="0" cy="0"/>
         </a:xfrm>
       </p:grpSpPr>
-      <!-- Header bar -->
       <p:sp>
         <p:nvSpPr>
           <p:cNvPr id="2" name="HeaderBar"/>
@@ -15735,7 +15736,6 @@
           </a:ln>
         </p:spPr>
       </p:sp>
-      <!-- Header left: section label -->
       <p:sp>
         <p:nvSpPr>
           <p:cNvPr id="3" name="HdrLeft"/>
@@ -15769,11 +15769,9 @@
               </a:rPr>
               <a:t>Provided by:  Terian Services</a:t>
             </a:r>
-            <a:endParaRPr lang="en-US" sz="1000" dirty="0"/>
-          </a:p>
-        </p:txBody>
-      </p:sp>
-      <!-- Header right: page label -->
+          </a:p>
+        </p:txBody>
+      </p:sp>
       <p:sp>
         <p:nvSpPr>
           <p:cNvPr id="4" name="HdrRight"/>
@@ -15807,11 +15805,9 @@
               </a:rPr>
               <a:t>Platform Capabilities</a:t>
             </a:r>
-            <a:endParaRPr lang="en-US" sz="900" dirty="0"/>
-          </a:p>
-        </p:txBody>
-      </p:sp>
-      <!-- Slide title -->
+          </a:p>
+        </p:txBody>
+      </p:sp>
       <p:sp>
         <p:nvSpPr>
           <p:cNvPr id="5" name="SlideTitle"/>
@@ -15845,11 +15841,9 @@
               </a:rPr>
               <a:t>Fraud Detection — Review Workflow</a:t>
             </a:r>
-            <a:endParaRPr lang="en-US" sz="2400" dirty="0"/>
-          </a:p>
-        </p:txBody>
-      </p:sp>
-      <!-- Cyan accent line -->
+          </a:p>
+        </p:txBody>
+      </p:sp>
       <p:sp>
         <p:nvSpPr>
           <p:cNvPr id="6" name="CyanLine"/>
@@ -15870,7 +15864,6 @@
           <a:ln/>
         </p:spPr>
       </p:sp>
-      <!-- Workflow diagram image -->
       <p:pic>
         <p:nvPicPr>
           <p:cNvPr id="7" name="WorkflowDiagram"/>
@@ -15895,6 +15888,2002 @@
           </a:prstGeom>
         </p:spPr>
       </p:pic>
+    </p:spTree>
+  </p:cSld>
+  <p:clrMapOvr>
+    <a:masterClrMapping/>
+  </p:clrMapOvr>
+</p:sld>
+</file>
+
+<file path=ppt/slides/slide27.xml><?xml version="1.0" encoding="utf-8"?>
+<p:sld xmlns:a="http://schemas.openxmlformats.org/drawingml/2006/main" xmlns:r="http://schemas.openxmlformats.org/officeDocument/2006/relationships" xmlns:p="http://schemas.openxmlformats.org/presentationml/2006/main">
+  <p:cSld name="Graph Patterns 1of2">
+    <p:bg>
+      <p:bgPr>
+        <a:solidFill>
+          <a:srgbClr val="F0F6FC"/>
+        </a:solidFill>
+        <a:effectLst/>
+      </p:bgPr>
+    </p:bg>
+    <p:spTree>
+      <p:nvGrpSpPr>
+        <p:cNvPr id="1" name=""/>
+        <p:cNvGrpSpPr/>
+        <p:nvPr/>
+      </p:nvGrpSpPr>
+      <p:grpSpPr>
+        <a:xfrm>
+          <a:off x="0" y="0"/>
+          <a:ext cx="0" cy="0"/>
+          <a:chOff x="0" y="0"/>
+          <a:chExt cx="0" cy="0"/>
+        </a:xfrm>
+      </p:grpSpPr>
+      <!-- Header bar -->
+      <p:sp>
+        <p:nvSpPr>
+          <p:cNvPr id="2" name="HeaderBar"/>
+          <p:cNvSpPr/>
+          <p:nvPr/>
+        </p:nvSpPr>
+        <p:spPr>
+          <a:xfrm>
+            <a:off x="0" y="0"/>
+            <a:ext cx="9144000" cy="475488"/>
+          </a:xfrm>
+          <a:prstGeom prst="rect">
+            <a:avLst/>
+          </a:prstGeom>
+          <a:solidFill>
+            <a:srgbClr val="0F2744"/>
+          </a:solidFill>
+          <a:ln w="12700">
+            <a:solidFill>
+              <a:srgbClr val="0F2744"/>
+            </a:solidFill>
+            <a:prstDash val="solid"/>
+          </a:ln>
+        </p:spPr>
+      </p:sp>
+      <p:sp>
+        <p:nvSpPr>
+          <p:cNvPr id="3" name="HdrLeft"/>
+          <p:cNvSpPr/>
+          <p:nvPr/>
+        </p:nvSpPr>
+        <p:spPr>
+          <a:xfrm>
+            <a:off x="274320" y="0"/>
+            <a:ext cx="4114800" cy="475488"/>
+          </a:xfrm>
+          <a:prstGeom prst="rect">
+            <a:avLst/>
+          </a:prstGeom>
+          <a:noFill/>
+          <a:ln/>
+        </p:spPr>
+        <p:txBody>
+          <a:bodyPr wrap="square" lIns="0" tIns="0" rIns="0" bIns="0" rtlCol="0" anchor="ctr"/>
+          <a:lstStyle/>
+          <a:p>
+            <a:pPr marL="0" indent="0">
+              <a:buNone/>
+            </a:pPr>
+            <a:r>
+              <a:rPr lang="en-US" sz="1000" dirty="0">
+                <a:solidFill>
+                  <a:srgbClr val="D6E4F0"/>
+                </a:solidFill>
+                <a:latin typeface="Calibri" pitchFamily="34" charset="0"/>
+              </a:rPr>
+              <a:t>Provided by:  Terian Services</a:t>
+            </a:r>
+          </a:p>
+        </p:txBody>
+      </p:sp>
+      <p:sp>
+        <p:nvSpPr>
+          <p:cNvPr id="4" name="HdrRight"/>
+          <p:cNvSpPr/>
+          <p:nvPr/>
+        </p:nvSpPr>
+        <p:spPr>
+          <a:xfrm>
+            <a:off x="4572000" y="0"/>
+            <a:ext cx="4297680" cy="475488"/>
+          </a:xfrm>
+          <a:prstGeom prst="rect">
+            <a:avLst/>
+          </a:prstGeom>
+          <a:noFill/>
+          <a:ln/>
+        </p:spPr>
+        <p:txBody>
+          <a:bodyPr wrap="square" lIns="0" tIns="0" rIns="0" bIns="0" rtlCol="0" anchor="ctr"/>
+          <a:lstStyle/>
+          <a:p>
+            <a:pPr marL="0" indent="0" algn="r">
+              <a:buNone/>
+            </a:pPr>
+            <a:r>
+              <a:rPr lang="en-US" sz="900" dirty="0">
+                <a:solidFill>
+                  <a:srgbClr val="00B4D8"/>
+                </a:solidFill>
+                <a:latin typeface="Calibri" pitchFamily="34" charset="0"/>
+              </a:rPr>
+              <a:t>Platform Capabilities</a:t>
+            </a:r>
+          </a:p>
+        </p:txBody>
+      </p:sp>
+      <p:sp>
+        <p:nvSpPr>
+          <p:cNvPr id="5" name="SlideTitle"/>
+          <p:cNvSpPr/>
+          <p:nvPr/>
+        </p:nvSpPr>
+        <p:spPr>
+          <a:xfrm>
+            <a:off x="457200" y="548640"/>
+            <a:ext cx="8229600" cy="502920"/>
+          </a:xfrm>
+          <a:prstGeom prst="rect">
+            <a:avLst/>
+          </a:prstGeom>
+          <a:noFill/>
+          <a:ln/>
+        </p:spPr>
+        <p:txBody>
+          <a:bodyPr wrap="square" lIns="0" tIns="0" rIns="0" bIns="0" rtlCol="0" anchor="ctr"/>
+          <a:lstStyle/>
+          <a:p>
+            <a:pPr marL="0" indent="0">
+              <a:buNone/>
+            </a:pPr>
+            <a:r>
+              <a:rPr lang="en-US" sz="2000" b="1" dirty="0">
+                <a:solidFill>
+                  <a:srgbClr val="0F2744"/>
+                </a:solidFill>
+                <a:latin typeface="Georgia" pitchFamily="34" charset="0"/>
+              </a:rPr>
+              <a:t>Integrity Analytics — Rings &amp; Super Nominator</a:t>
+            </a:r>
+          </a:p>
+        </p:txBody>
+      </p:sp>
+      <p:sp>
+        <p:nvSpPr>
+          <p:cNvPr id="6" name="CardBg_Ring"/>
+          <p:cNvSpPr/>
+          <p:nvPr/>
+        </p:nvSpPr>
+        <p:spPr>
+          <a:xfrm>
+            <a:off x="274320" y="1240000"/>
+            <a:ext cx="4183380" cy="3720000"/>
+          </a:xfrm>
+          <a:prstGeom prst="roundRect">
+            <a:avLst>
+              <a:gd name="adj" fmla="val 30000"/>
+            </a:avLst>
+          </a:prstGeom>
+          <a:solidFill>
+            <a:srgbClr val="FFFFFF"/>
+          </a:solidFill>
+          <a:ln w="12700">
+            <a:solidFill>
+              <a:srgbClr val="D1E3F0"/>
+            </a:solidFill>
+          </a:ln>
+          <a:effectLst>
+            <a:outerShdw blurRad="76200" dist="38100" dir="5400000" algn="ctr" rotWithShape="0">
+              <a:srgbClr val="1A3A5C">
+                <a:alpha val="15000"/>
+              </a:srgbClr>
+            </a:outerShdw>
+          </a:effectLst>
+        </p:spPr>
+      </p:sp>
+      <p:sp>
+        <p:nvSpPr>
+          <p:cNvPr id="7" name="CardHdr_Ring"/>
+          <p:cNvSpPr/>
+          <p:nvPr/>
+        </p:nvSpPr>
+        <p:spPr>
+          <a:xfrm>
+            <a:off x="274320" y="1240000"/>
+            <a:ext cx="4183380" cy="580000"/>
+          </a:xfrm>
+          <a:prstGeom prst="roundRect">
+            <a:avLst>
+              <a:gd name="adj" fmla="val 30000"/>
+            </a:avLst>
+          </a:prstGeom>
+          <a:solidFill>
+            <a:srgbClr val="0F2744"/>
+          </a:solidFill>
+          <a:ln>
+            <a:noFill/>
+          </a:ln>
+        </p:spPr>
+        <p:txBody>
+          <a:bodyPr wrap="square" lIns="91440" tIns="0" rIns="91440" bIns="0" rtlCol="0" anchor="ctr"/>
+          <a:lstStyle/>
+          <a:p>
+            <a:pPr marL="0" indent="0" algn="ctr">
+              <a:buNone/>
+            </a:pPr>
+            <a:r>
+              <a:rPr lang="en-US" sz="1800" b="1" dirty="0">
+                <a:solidFill>
+                  <a:srgbClr val="FFFFFF"/>
+                </a:solidFill>
+                <a:latin typeface="Georgia" pitchFamily="34" charset="0"/>
+              </a:rPr>
+              <a:t>Nomination Rings</a:t>
+            </a:r>
+          </a:p>
+        </p:txBody>
+      </p:sp>
+      <p:sp>
+        <p:nvSpPr>
+          <p:cNvPr id="8" name="CyanBar_Ring"/>
+          <p:cNvSpPr/>
+          <p:nvPr/>
+        </p:nvSpPr>
+        <p:spPr>
+          <a:xfrm>
+            <a:off x="274320" y="1820000"/>
+            <a:ext cx="54864" cy="3140000"/>
+          </a:xfrm>
+          <a:prstGeom prst="rect">
+            <a:avLst/>
+          </a:prstGeom>
+          <a:solidFill>
+            <a:srgbClr val="00B4D8"/>
+          </a:solidFill>
+          <a:ln>
+            <a:noFill/>
+          </a:ln>
+        </p:spPr>
+      </p:sp>
+      <p:sp>
+        <p:nvSpPr>
+          <p:cNvPr id="9" name="DetectLbl_Ring"/>
+          <p:cNvSpPr/>
+          <p:nvPr/>
+        </p:nvSpPr>
+        <p:spPr>
+          <a:xfrm>
+            <a:off x="429320" y="1920000"/>
+            <a:ext cx="3936940" cy="127000"/>
+          </a:xfrm>
+          <a:prstGeom prst="rect">
+            <a:avLst/>
+          </a:prstGeom>
+          <a:noFill/>
+          <a:ln/>
+        </p:spPr>
+        <p:txBody>
+          <a:bodyPr wrap="square" lIns="0" tIns="0" rIns="0" bIns="0" rtlCol="0" anchor="t"/>
+          <a:lstStyle/>
+          <a:p>
+            <a:pPr marL="0" indent="0">
+              <a:buNone/>
+            </a:pPr>
+            <a:r>
+              <a:rPr lang="en-US" sz="700" b="1" spc="200" dirty="0">
+                <a:solidFill>
+                  <a:srgbClr val="6B7280"/>
+                </a:solidFill>
+                <a:latin typeface="Calibri" pitchFamily="34" charset="0"/>
+              </a:rPr>
+              <a:t>WHAT IT DETECTS</a:t>
+            </a:r>
+          </a:p>
+        </p:txBody>
+      </p:sp>
+      <p:sp>
+        <p:nvSpPr>
+          <p:cNvPr id="10" name="DetectTxt_Ring"/>
+          <p:cNvSpPr/>
+          <p:nvPr/>
+        </p:nvSpPr>
+        <p:spPr>
+          <a:xfrm>
+            <a:off x="429320" y="2060000"/>
+            <a:ext cx="3936940" cy="780000"/>
+          </a:xfrm>
+          <a:prstGeom prst="rect">
+            <a:avLst/>
+          </a:prstGeom>
+          <a:noFill/>
+          <a:ln/>
+        </p:spPr>
+        <p:txBody>
+          <a:bodyPr wrap="square" lIns="0" tIns="0" rIns="0" bIns="0" rtlCol="0" anchor="t"/>
+          <a:lstStyle/>
+          <a:p>
+            <a:pPr marL="0" indent="0">
+              <a:buNone/>
+            </a:pPr>
+            <a:r>
+              <a:rPr lang="en-US" sz="1300" dirty="0">
+                <a:solidFill>
+                  <a:srgbClr val="1A3A5C"/>
+                </a:solidFill>
+                <a:latin typeface="Calibri" pitchFamily="34" charset="0"/>
+              </a:rPr>
+              <a:t>Circular nomination networks: A nominates B, B nominates C, C nominates A. Detects cycles of 3 or more hops — flagging collusive reciprocal award behaviour across any network depth.</a:t>
+            </a:r>
+          </a:p>
+        </p:txBody>
+      </p:sp>
+      <p:sp>
+        <p:nvSpPr>
+          <p:cNvPr id="11" name="Sep_Ring"/>
+          <p:cNvSpPr/>
+          <p:nvPr/>
+        </p:nvSpPr>
+        <p:spPr>
+          <a:xfrm>
+            <a:off x="429320" y="2900000"/>
+            <a:ext cx="3936940" cy="12700"/>
+          </a:xfrm>
+          <a:prstGeom prst="rect">
+            <a:avLst/>
+          </a:prstGeom>
+          <a:solidFill>
+            <a:srgbClr val="E5EDF5"/>
+          </a:solidFill>
+          <a:ln>
+            <a:noFill/>
+          </a:ln>
+        </p:spPr>
+      </p:sp>
+      <p:sp>
+        <p:nvSpPr>
+          <p:cNvPr id="12" name="MethodLbl_Ring"/>
+          <p:cNvSpPr/>
+          <p:nvPr/>
+        </p:nvSpPr>
+        <p:spPr>
+          <a:xfrm>
+            <a:off x="429320" y="2970000"/>
+            <a:ext cx="3936940" cy="127000"/>
+          </a:xfrm>
+          <a:prstGeom prst="rect">
+            <a:avLst/>
+          </a:prstGeom>
+          <a:noFill/>
+          <a:ln/>
+        </p:spPr>
+        <p:txBody>
+          <a:bodyPr wrap="square" lIns="0" tIns="0" rIns="0" bIns="0" rtlCol="0" anchor="t"/>
+          <a:lstStyle/>
+          <a:p>
+            <a:pPr marL="0" indent="0">
+              <a:buNone/>
+            </a:pPr>
+            <a:r>
+              <a:rPr lang="en-US" sz="700" b="1" spc="200" dirty="0">
+                <a:solidFill>
+                  <a:srgbClr val="6B7280"/>
+                </a:solidFill>
+                <a:latin typeface="Calibri" pitchFamily="34" charset="0"/>
+              </a:rPr>
+              <a:t>HOW IT WORKS</a:t>
+            </a:r>
+          </a:p>
+        </p:txBody>
+      </p:sp>
+      <p:sp>
+        <p:nvSpPr>
+          <p:cNvPr id="13" name="MethodTxt_Ring"/>
+          <p:cNvSpPr/>
+          <p:nvPr/>
+        </p:nvSpPr>
+        <p:spPr>
+          <a:xfrm>
+            <a:off x="429320" y="3130000"/>
+            <a:ext cx="3936940" cy="820000"/>
+          </a:xfrm>
+          <a:prstGeom prst="rect">
+            <a:avLst/>
+          </a:prstGeom>
+          <a:noFill/>
+          <a:ln/>
+        </p:spPr>
+        <p:txBody>
+          <a:bodyPr wrap="square" lIns="0" tIns="0" rIns="0" bIns="0" rtlCol="0" anchor="t"/>
+          <a:lstStyle/>
+          <a:p>
+            <a:pPr marL="0" indent="0">
+              <a:buNone/>
+            </a:pPr>
+            <a:r>
+              <a:rPr lang="en-US" sz="1200" dirty="0">
+                <a:solidFill>
+                  <a:srgbClr val="374151"/>
+                </a:solidFill>
+                <a:latin typeface="Calibri" pitchFamily="34" charset="0"/>
+              </a:rPr>
+              <a:t>NetworkX simple_cycles() on the directed nominations graph, deduplicated by frozenset. Severity scales with total $ at risk: Critical ≥$10K, High ≥$5K, Medium ≥$1K, Low below $1K.</a:t>
+            </a:r>
+          </a:p>
+        </p:txBody>
+      </p:sp>
+      <p:sp>
+        <p:nvSpPr>
+          <p:cNvPr id="14" name="Sep2_Ring"/>
+          <p:cNvSpPr/>
+          <p:nvPr/>
+        </p:nvSpPr>
+        <p:spPr>
+          <a:xfrm>
+            <a:off x="429320" y="4010000"/>
+            <a:ext cx="3936940" cy="12700"/>
+          </a:xfrm>
+          <a:prstGeom prst="rect">
+            <a:avLst/>
+          </a:prstGeom>
+          <a:solidFill>
+            <a:srgbClr val="E5EDF5"/>
+          </a:solidFill>
+          <a:ln>
+            <a:noFill/>
+          </a:ln>
+        </p:spPr>
+      </p:sp>
+      <p:sp>
+        <p:nvSpPr>
+          <p:cNvPr id="15" name="SevLbl_Ring"/>
+          <p:cNvSpPr/>
+          <p:nvPr/>
+        </p:nvSpPr>
+        <p:spPr>
+          <a:xfrm>
+            <a:off x="429320" y="4080000"/>
+            <a:ext cx="3936940" cy="127000"/>
+          </a:xfrm>
+          <a:prstGeom prst="rect">
+            <a:avLst/>
+          </a:prstGeom>
+          <a:noFill/>
+          <a:ln/>
+        </p:spPr>
+        <p:txBody>
+          <a:bodyPr wrap="square" lIns="0" tIns="0" rIns="0" bIns="0" rtlCol="0" anchor="t"/>
+          <a:lstStyle/>
+          <a:p>
+            <a:pPr marL="0" indent="0">
+              <a:buNone/>
+            </a:pPr>
+            <a:r>
+              <a:rPr lang="en-US" sz="700" b="1" spc="200" dirty="0">
+                <a:solidFill>
+                  <a:srgbClr val="6B7280"/>
+                </a:solidFill>
+                <a:latin typeface="Calibri" pitchFamily="34" charset="0"/>
+              </a:rPr>
+              <a:t>SEVERITY LEVELS</a:t>
+            </a:r>
+          </a:p>
+        </p:txBody>
+      </p:sp>
+      <p:sp>
+        <p:nvSpPr>
+          <p:cNvPr id="16" name="Pill_Ring_CRITICAL"/>
+          <p:cNvSpPr/>
+          <p:nvPr/>
+        </p:nvSpPr>
+        <p:spPr>
+          <a:xfrm>
+            <a:off x="429320" y="4250000"/>
+            <a:ext cx="780000" cy="240000"/>
+          </a:xfrm>
+          <a:prstGeom prst="roundRect">
+            <a:avLst>
+              <a:gd name="adj" fmla="val 50000"/>
+            </a:avLst>
+          </a:prstGeom>
+          <a:solidFill>
+            <a:srgbClr val="DC2626"/>
+          </a:solidFill>
+          <a:ln>
+            <a:noFill/>
+          </a:ln>
+        </p:spPr>
+        <p:txBody>
+          <a:bodyPr wrap="square" lIns="60960" tIns="0" rIns="60960" bIns="0" rtlCol="0" anchor="ctr"/>
+          <a:lstStyle/>
+          <a:p>
+            <a:pPr marL="0" indent="0" algn="ctr">
+              <a:buNone/>
+            </a:pPr>
+            <a:r>
+              <a:rPr lang="en-US" sz="800" b="1" spc="100" dirty="0">
+                <a:solidFill>
+                  <a:srgbClr val="FFFFFF"/>
+                </a:solidFill>
+                <a:latin typeface="Calibri" pitchFamily="34" charset="0"/>
+              </a:rPr>
+              <a:t>CRITICAL</a:t>
+            </a:r>
+          </a:p>
+        </p:txBody>
+      </p:sp>
+      <p:sp>
+        <p:nvSpPr>
+          <p:cNvPr id="17" name="Pill_Ring_HIGH"/>
+          <p:cNvSpPr/>
+          <p:nvPr/>
+        </p:nvSpPr>
+        <p:spPr>
+          <a:xfrm>
+            <a:off x="1279320" y="4250000"/>
+            <a:ext cx="780000" cy="240000"/>
+          </a:xfrm>
+          <a:prstGeom prst="roundRect">
+            <a:avLst>
+              <a:gd name="adj" fmla="val 50000"/>
+            </a:avLst>
+          </a:prstGeom>
+          <a:solidFill>
+            <a:srgbClr val="D97706"/>
+          </a:solidFill>
+          <a:ln>
+            <a:noFill/>
+          </a:ln>
+        </p:spPr>
+        <p:txBody>
+          <a:bodyPr wrap="square" lIns="60960" tIns="0" rIns="60960" bIns="0" rtlCol="0" anchor="ctr"/>
+          <a:lstStyle/>
+          <a:p>
+            <a:pPr marL="0" indent="0" algn="ctr">
+              <a:buNone/>
+            </a:pPr>
+            <a:r>
+              <a:rPr lang="en-US" sz="800" b="1" spc="100" dirty="0">
+                <a:solidFill>
+                  <a:srgbClr val="FFFFFF"/>
+                </a:solidFill>
+                <a:latin typeface="Calibri" pitchFamily="34" charset="0"/>
+              </a:rPr>
+              <a:t>HIGH</a:t>
+            </a:r>
+          </a:p>
+        </p:txBody>
+      </p:sp>
+      <p:sp>
+        <p:nvSpPr>
+          <p:cNvPr id="18" name="Pill_Ring_MEDIUM"/>
+          <p:cNvSpPr/>
+          <p:nvPr/>
+        </p:nvSpPr>
+        <p:spPr>
+          <a:xfrm>
+            <a:off x="2129320" y="4250000"/>
+            <a:ext cx="780000" cy="240000"/>
+          </a:xfrm>
+          <a:prstGeom prst="roundRect">
+            <a:avLst>
+              <a:gd name="adj" fmla="val 50000"/>
+            </a:avLst>
+          </a:prstGeom>
+          <a:solidFill>
+            <a:srgbClr val="0369A1"/>
+          </a:solidFill>
+          <a:ln>
+            <a:noFill/>
+          </a:ln>
+        </p:spPr>
+        <p:txBody>
+          <a:bodyPr wrap="square" lIns="60960" tIns="0" rIns="60960" bIns="0" rtlCol="0" anchor="ctr"/>
+          <a:lstStyle/>
+          <a:p>
+            <a:pPr marL="0" indent="0" algn="ctr">
+              <a:buNone/>
+            </a:pPr>
+            <a:r>
+              <a:rPr lang="en-US" sz="800" b="1" spc="100" dirty="0">
+                <a:solidFill>
+                  <a:srgbClr val="FFFFFF"/>
+                </a:solidFill>
+                <a:latin typeface="Calibri" pitchFamily="34" charset="0"/>
+              </a:rPr>
+              <a:t>MEDIUM</a:t>
+            </a:r>
+          </a:p>
+        </p:txBody>
+      </p:sp>
+      <p:sp>
+        <p:nvSpPr>
+          <p:cNvPr id="19" name="Pill_Ring_LOW"/>
+          <p:cNvSpPr/>
+          <p:nvPr/>
+        </p:nvSpPr>
+        <p:spPr>
+          <a:xfrm>
+            <a:off x="2979320" y="4250000"/>
+            <a:ext cx="780000" cy="240000"/>
+          </a:xfrm>
+          <a:prstGeom prst="roundRect">
+            <a:avLst>
+              <a:gd name="adj" fmla="val 50000"/>
+            </a:avLst>
+          </a:prstGeom>
+          <a:solidFill>
+            <a:srgbClr val="6B7280"/>
+          </a:solidFill>
+          <a:ln>
+            <a:noFill/>
+          </a:ln>
+        </p:spPr>
+        <p:txBody>
+          <a:bodyPr wrap="square" lIns="60960" tIns="0" rIns="60960" bIns="0" rtlCol="0" anchor="ctr"/>
+          <a:lstStyle/>
+          <a:p>
+            <a:pPr marL="0" indent="0" algn="ctr">
+              <a:buNone/>
+            </a:pPr>
+            <a:r>
+              <a:rPr lang="en-US" sz="800" b="1" spc="100" dirty="0">
+                <a:solidFill>
+                  <a:srgbClr val="FFFFFF"/>
+                </a:solidFill>
+                <a:latin typeface="Calibri" pitchFamily="34" charset="0"/>
+              </a:rPr>
+              <a:t>LOW</a:t>
+            </a:r>
+          </a:p>
+        </p:txBody>
+      </p:sp>
+      <p:sp>
+        <p:nvSpPr>
+          <p:cNvPr id="20" name="CardBg_SuperNom"/>
+          <p:cNvSpPr/>
+          <p:nvPr/>
+        </p:nvSpPr>
+        <p:spPr>
+          <a:xfrm>
+            <a:off x="4686300" y="1240000"/>
+            <a:ext cx="4183380" cy="3720000"/>
+          </a:xfrm>
+          <a:prstGeom prst="roundRect">
+            <a:avLst>
+              <a:gd name="adj" fmla="val 30000"/>
+            </a:avLst>
+          </a:prstGeom>
+          <a:solidFill>
+            <a:srgbClr val="FFFFFF"/>
+          </a:solidFill>
+          <a:ln w="12700">
+            <a:solidFill>
+              <a:srgbClr val="D1E3F0"/>
+            </a:solidFill>
+          </a:ln>
+          <a:effectLst>
+            <a:outerShdw blurRad="76200" dist="38100" dir="5400000" algn="ctr" rotWithShape="0">
+              <a:srgbClr val="1A3A5C">
+                <a:alpha val="15000"/>
+              </a:srgbClr>
+            </a:outerShdw>
+          </a:effectLst>
+        </p:spPr>
+      </p:sp>
+      <p:sp>
+        <p:nvSpPr>
+          <p:cNvPr id="21" name="CardHdr_SuperNom"/>
+          <p:cNvSpPr/>
+          <p:nvPr/>
+        </p:nvSpPr>
+        <p:spPr>
+          <a:xfrm>
+            <a:off x="4686300" y="1240000"/>
+            <a:ext cx="4183380" cy="580000"/>
+          </a:xfrm>
+          <a:prstGeom prst="roundRect">
+            <a:avLst>
+              <a:gd name="adj" fmla="val 30000"/>
+            </a:avLst>
+          </a:prstGeom>
+          <a:solidFill>
+            <a:srgbClr val="00B4D8"/>
+          </a:solidFill>
+          <a:ln>
+            <a:noFill/>
+          </a:ln>
+        </p:spPr>
+        <p:txBody>
+          <a:bodyPr wrap="square" lIns="91440" tIns="0" rIns="91440" bIns="0" rtlCol="0" anchor="ctr"/>
+          <a:lstStyle/>
+          <a:p>
+            <a:pPr marL="0" indent="0" algn="ctr">
+              <a:buNone/>
+            </a:pPr>
+            <a:r>
+              <a:rPr lang="en-US" sz="1800" b="1" dirty="0">
+                <a:solidFill>
+                  <a:srgbClr val="FFFFFF"/>
+                </a:solidFill>
+                <a:latin typeface="Georgia" pitchFamily="34" charset="0"/>
+              </a:rPr>
+              <a:t>Super Nominator</a:t>
+            </a:r>
+          </a:p>
+        </p:txBody>
+      </p:sp>
+      <p:sp>
+        <p:nvSpPr>
+          <p:cNvPr id="22" name="CyanBar_SuperNom"/>
+          <p:cNvSpPr/>
+          <p:nvPr/>
+        </p:nvSpPr>
+        <p:spPr>
+          <a:xfrm>
+            <a:off x="4686300" y="1820000"/>
+            <a:ext cx="54864" cy="3140000"/>
+          </a:xfrm>
+          <a:prstGeom prst="rect">
+            <a:avLst/>
+          </a:prstGeom>
+          <a:solidFill>
+            <a:srgbClr val="00B4D8"/>
+          </a:solidFill>
+          <a:ln>
+            <a:noFill/>
+          </a:ln>
+        </p:spPr>
+      </p:sp>
+      <p:sp>
+        <p:nvSpPr>
+          <p:cNvPr id="23" name="DetectLbl_SuperNom"/>
+          <p:cNvSpPr/>
+          <p:nvPr/>
+        </p:nvSpPr>
+        <p:spPr>
+          <a:xfrm>
+            <a:off x="4841300" y="1920000"/>
+            <a:ext cx="3936940" cy="127000"/>
+          </a:xfrm>
+          <a:prstGeom prst="rect">
+            <a:avLst/>
+          </a:prstGeom>
+          <a:noFill/>
+          <a:ln/>
+        </p:spPr>
+        <p:txBody>
+          <a:bodyPr wrap="square" lIns="0" tIns="0" rIns="0" bIns="0" rtlCol="0" anchor="t"/>
+          <a:lstStyle/>
+          <a:p>
+            <a:pPr marL="0" indent="0">
+              <a:buNone/>
+            </a:pPr>
+            <a:r>
+              <a:rPr lang="en-US" sz="700" b="1" spc="200" dirty="0">
+                <a:solidFill>
+                  <a:srgbClr val="6B7280"/>
+                </a:solidFill>
+                <a:latin typeface="Calibri" pitchFamily="34" charset="0"/>
+              </a:rPr>
+              <a:t>WHAT IT DETECTS</a:t>
+            </a:r>
+          </a:p>
+        </p:txBody>
+      </p:sp>
+      <p:sp>
+        <p:nvSpPr>
+          <p:cNvPr id="24" name="DetectTxt_SuperNom"/>
+          <p:cNvSpPr/>
+          <p:nvPr/>
+        </p:nvSpPr>
+        <p:spPr>
+          <a:xfrm>
+            <a:off x="4841300" y="2060000"/>
+            <a:ext cx="3936940" cy="780000"/>
+          </a:xfrm>
+          <a:prstGeom prst="rect">
+            <a:avLst/>
+          </a:prstGeom>
+          <a:noFill/>
+          <a:ln/>
+        </p:spPr>
+        <p:txBody>
+          <a:bodyPr wrap="square" lIns="0" tIns="0" rIns="0" bIns="0" rtlCol="0" anchor="t"/>
+          <a:lstStyle/>
+          <a:p>
+            <a:pPr marL="0" indent="0">
+              <a:buNone/>
+            </a:pPr>
+            <a:r>
+              <a:rPr lang="en-US" sz="1300" dirty="0">
+                <a:solidFill>
+                  <a:srgbClr val="1A3A5C"/>
+                </a:solidFill>
+                <a:latin typeface="Calibri" pitchFamily="34" charset="0"/>
+              </a:rPr>
+              <a:t>One individual nominating at a statistically anomalous volume — a signal of coordinated slate management or a broker gaming the recognition programme at scale.</a:t>
+            </a:r>
+          </a:p>
+        </p:txBody>
+      </p:sp>
+      <p:sp>
+        <p:nvSpPr>
+          <p:cNvPr id="25" name="Sep_SuperNom"/>
+          <p:cNvSpPr/>
+          <p:nvPr/>
+        </p:nvSpPr>
+        <p:spPr>
+          <a:xfrm>
+            <a:off x="4841300" y="2900000"/>
+            <a:ext cx="3936940" cy="12700"/>
+          </a:xfrm>
+          <a:prstGeom prst="rect">
+            <a:avLst/>
+          </a:prstGeom>
+          <a:solidFill>
+            <a:srgbClr val="E5EDF5"/>
+          </a:solidFill>
+          <a:ln>
+            <a:noFill/>
+          </a:ln>
+        </p:spPr>
+      </p:sp>
+      <p:sp>
+        <p:nvSpPr>
+          <p:cNvPr id="26" name="MethodLbl_SuperNom"/>
+          <p:cNvSpPr/>
+          <p:nvPr/>
+        </p:nvSpPr>
+        <p:spPr>
+          <a:xfrm>
+            <a:off x="4841300" y="2970000"/>
+            <a:ext cx="3936940" cy="127000"/>
+          </a:xfrm>
+          <a:prstGeom prst="rect">
+            <a:avLst/>
+          </a:prstGeom>
+          <a:noFill/>
+          <a:ln/>
+        </p:spPr>
+        <p:txBody>
+          <a:bodyPr wrap="square" lIns="0" tIns="0" rIns="0" bIns="0" rtlCol="0" anchor="t"/>
+          <a:lstStyle/>
+          <a:p>
+            <a:pPr marL="0" indent="0">
+              <a:buNone/>
+            </a:pPr>
+            <a:r>
+              <a:rPr lang="en-US" sz="700" b="1" spc="200" dirty="0">
+                <a:solidFill>
+                  <a:srgbClr val="6B7280"/>
+                </a:solidFill>
+                <a:latin typeface="Calibri" pitchFamily="34" charset="0"/>
+              </a:rPr>
+              <a:t>HOW IT WORKS</a:t>
+            </a:r>
+          </a:p>
+        </p:txBody>
+      </p:sp>
+      <p:sp>
+        <p:nvSpPr>
+          <p:cNvPr id="27" name="MethodTxt_SuperNom"/>
+          <p:cNvSpPr/>
+          <p:nvPr/>
+        </p:nvSpPr>
+        <p:spPr>
+          <a:xfrm>
+            <a:off x="4841300" y="3130000"/>
+            <a:ext cx="3936940" cy="820000"/>
+          </a:xfrm>
+          <a:prstGeom prst="rect">
+            <a:avLst/>
+          </a:prstGeom>
+          <a:noFill/>
+          <a:ln/>
+        </p:spPr>
+        <p:txBody>
+          <a:bodyPr wrap="square" lIns="0" tIns="0" rIns="0" bIns="0" rtlCol="0" anchor="t"/>
+          <a:lstStyle/>
+          <a:p>
+            <a:pPr marL="0" indent="0">
+              <a:buNone/>
+            </a:pPr>
+            <a:r>
+              <a:rPr lang="en-US" sz="1200" dirty="0">
+                <a:solidFill>
+                  <a:srgbClr val="374151"/>
+                </a:solidFill>
+                <a:latin typeface="Calibri" pitchFamily="34" charset="0"/>
+              </a:rPr>
+              <a:t>Out-degree outlier: flags users exceeding mean + 2 standard deviations AND 3x the tenant median, minimum 5 nominations. High at 1.5x threshold, Medium otherwise.</a:t>
+            </a:r>
+          </a:p>
+        </p:txBody>
+      </p:sp>
+      <p:sp>
+        <p:nvSpPr>
+          <p:cNvPr id="28" name="Sep2_SuperNom"/>
+          <p:cNvSpPr/>
+          <p:nvPr/>
+        </p:nvSpPr>
+        <p:spPr>
+          <a:xfrm>
+            <a:off x="4841300" y="4010000"/>
+            <a:ext cx="3936940" cy="12700"/>
+          </a:xfrm>
+          <a:prstGeom prst="rect">
+            <a:avLst/>
+          </a:prstGeom>
+          <a:solidFill>
+            <a:srgbClr val="E5EDF5"/>
+          </a:solidFill>
+          <a:ln>
+            <a:noFill/>
+          </a:ln>
+        </p:spPr>
+      </p:sp>
+      <p:sp>
+        <p:nvSpPr>
+          <p:cNvPr id="29" name="SevLbl_SuperNom"/>
+          <p:cNvSpPr/>
+          <p:nvPr/>
+        </p:nvSpPr>
+        <p:spPr>
+          <a:xfrm>
+            <a:off x="4841300" y="4080000"/>
+            <a:ext cx="3936940" cy="127000"/>
+          </a:xfrm>
+          <a:prstGeom prst="rect">
+            <a:avLst/>
+          </a:prstGeom>
+          <a:noFill/>
+          <a:ln/>
+        </p:spPr>
+        <p:txBody>
+          <a:bodyPr wrap="square" lIns="0" tIns="0" rIns="0" bIns="0" rtlCol="0" anchor="t"/>
+          <a:lstStyle/>
+          <a:p>
+            <a:pPr marL="0" indent="0">
+              <a:buNone/>
+            </a:pPr>
+            <a:r>
+              <a:rPr lang="en-US" sz="700" b="1" spc="200" dirty="0">
+                <a:solidFill>
+                  <a:srgbClr val="6B7280"/>
+                </a:solidFill>
+                <a:latin typeface="Calibri" pitchFamily="34" charset="0"/>
+              </a:rPr>
+              <a:t>SEVERITY LEVELS</a:t>
+            </a:r>
+          </a:p>
+        </p:txBody>
+      </p:sp>
+      <p:sp>
+        <p:nvSpPr>
+          <p:cNvPr id="30" name="Pill_SuperNom_HIGH"/>
+          <p:cNvSpPr/>
+          <p:nvPr/>
+        </p:nvSpPr>
+        <p:spPr>
+          <a:xfrm>
+            <a:off x="4841300" y="4250000"/>
+            <a:ext cx="780000" cy="240000"/>
+          </a:xfrm>
+          <a:prstGeom prst="roundRect">
+            <a:avLst>
+              <a:gd name="adj" fmla="val 50000"/>
+            </a:avLst>
+          </a:prstGeom>
+          <a:solidFill>
+            <a:srgbClr val="D97706"/>
+          </a:solidFill>
+          <a:ln>
+            <a:noFill/>
+          </a:ln>
+        </p:spPr>
+        <p:txBody>
+          <a:bodyPr wrap="square" lIns="60960" tIns="0" rIns="60960" bIns="0" rtlCol="0" anchor="ctr"/>
+          <a:lstStyle/>
+          <a:p>
+            <a:pPr marL="0" indent="0" algn="ctr">
+              <a:buNone/>
+            </a:pPr>
+            <a:r>
+              <a:rPr lang="en-US" sz="800" b="1" spc="100" dirty="0">
+                <a:solidFill>
+                  <a:srgbClr val="FFFFFF"/>
+                </a:solidFill>
+                <a:latin typeface="Calibri" pitchFamily="34" charset="0"/>
+              </a:rPr>
+              <a:t>HIGH</a:t>
+            </a:r>
+          </a:p>
+        </p:txBody>
+      </p:sp>
+      <p:sp>
+        <p:nvSpPr>
+          <p:cNvPr id="31" name="Pill_SuperNom_MEDIUM"/>
+          <p:cNvSpPr/>
+          <p:nvPr/>
+        </p:nvSpPr>
+        <p:spPr>
+          <a:xfrm>
+            <a:off x="5691300" y="4250000"/>
+            <a:ext cx="780000" cy="240000"/>
+          </a:xfrm>
+          <a:prstGeom prst="roundRect">
+            <a:avLst>
+              <a:gd name="adj" fmla="val 50000"/>
+            </a:avLst>
+          </a:prstGeom>
+          <a:solidFill>
+            <a:srgbClr val="0369A1"/>
+          </a:solidFill>
+          <a:ln>
+            <a:noFill/>
+          </a:ln>
+        </p:spPr>
+        <p:txBody>
+          <a:bodyPr wrap="square" lIns="60960" tIns="0" rIns="60960" bIns="0" rtlCol="0" anchor="ctr"/>
+          <a:lstStyle/>
+          <a:p>
+            <a:pPr marL="0" indent="0" algn="ctr">
+              <a:buNone/>
+            </a:pPr>
+            <a:r>
+              <a:rPr lang="en-US" sz="800" b="1" spc="100" dirty="0">
+                <a:solidFill>
+                  <a:srgbClr val="FFFFFF"/>
+                </a:solidFill>
+                <a:latin typeface="Calibri" pitchFamily="34" charset="0"/>
+              </a:rPr>
+              <a:t>MEDIUM</a:t>
+            </a:r>
+          </a:p>
+        </p:txBody>
+      </p:sp>
+    </p:spTree>
+  </p:cSld>
+  <p:clrMapOvr>
+    <a:masterClrMapping/>
+  </p:clrMapOvr>
+</p:sld>
+</file>
+
+<file path=ppt/slides/slide28.xml><?xml version="1.0" encoding="utf-8"?>
+<p:sld xmlns:a="http://schemas.openxmlformats.org/drawingml/2006/main" xmlns:r="http://schemas.openxmlformats.org/officeDocument/2006/relationships" xmlns:p="http://schemas.openxmlformats.org/presentationml/2006/main">
+  <p:cSld name="Graph Patterns 2of2">
+    <p:bg>
+      <p:bgPr>
+        <a:solidFill>
+          <a:srgbClr val="F0F6FC"/>
+        </a:solidFill>
+        <a:effectLst/>
+      </p:bgPr>
+    </p:bg>
+    <p:spTree>
+      <p:nvGrpSpPr>
+        <p:cNvPr id="1" name=""/>
+        <p:cNvGrpSpPr/>
+        <p:nvPr/>
+      </p:nvGrpSpPr>
+      <p:grpSpPr>
+        <a:xfrm>
+          <a:off x="0" y="0"/>
+          <a:ext cx="0" cy="0"/>
+          <a:chOff x="0" y="0"/>
+          <a:chExt cx="0" cy="0"/>
+        </a:xfrm>
+      </p:grpSpPr>
+      <!-- Header bar -->
+      <p:sp>
+        <p:nvSpPr>
+          <p:cNvPr id="2" name="HeaderBar"/>
+          <p:cNvSpPr/>
+          <p:nvPr/>
+        </p:nvSpPr>
+        <p:spPr>
+          <a:xfrm>
+            <a:off x="0" y="0"/>
+            <a:ext cx="9144000" cy="475488"/>
+          </a:xfrm>
+          <a:prstGeom prst="rect">
+            <a:avLst/>
+          </a:prstGeom>
+          <a:solidFill>
+            <a:srgbClr val="0F2744"/>
+          </a:solidFill>
+          <a:ln w="12700">
+            <a:solidFill>
+              <a:srgbClr val="0F2744"/>
+            </a:solidFill>
+            <a:prstDash val="solid"/>
+          </a:ln>
+        </p:spPr>
+      </p:sp>
+      <p:sp>
+        <p:nvSpPr>
+          <p:cNvPr id="3" name="HdrLeft"/>
+          <p:cNvSpPr/>
+          <p:nvPr/>
+        </p:nvSpPr>
+        <p:spPr>
+          <a:xfrm>
+            <a:off x="274320" y="0"/>
+            <a:ext cx="4114800" cy="475488"/>
+          </a:xfrm>
+          <a:prstGeom prst="rect">
+            <a:avLst/>
+          </a:prstGeom>
+          <a:noFill/>
+          <a:ln/>
+        </p:spPr>
+        <p:txBody>
+          <a:bodyPr wrap="square" lIns="0" tIns="0" rIns="0" bIns="0" rtlCol="0" anchor="ctr"/>
+          <a:lstStyle/>
+          <a:p>
+            <a:pPr marL="0" indent="0">
+              <a:buNone/>
+            </a:pPr>
+            <a:r>
+              <a:rPr lang="en-US" sz="1000" dirty="0">
+                <a:solidFill>
+                  <a:srgbClr val="D6E4F0"/>
+                </a:solidFill>
+                <a:latin typeface="Calibri" pitchFamily="34" charset="0"/>
+              </a:rPr>
+              <a:t>Provided by:  Terian Services</a:t>
+            </a:r>
+          </a:p>
+        </p:txBody>
+      </p:sp>
+      <p:sp>
+        <p:nvSpPr>
+          <p:cNvPr id="4" name="HdrRight"/>
+          <p:cNvSpPr/>
+          <p:nvPr/>
+        </p:nvSpPr>
+        <p:spPr>
+          <a:xfrm>
+            <a:off x="4572000" y="0"/>
+            <a:ext cx="4297680" cy="475488"/>
+          </a:xfrm>
+          <a:prstGeom prst="rect">
+            <a:avLst/>
+          </a:prstGeom>
+          <a:noFill/>
+          <a:ln/>
+        </p:spPr>
+        <p:txBody>
+          <a:bodyPr wrap="square" lIns="0" tIns="0" rIns="0" bIns="0" rtlCol="0" anchor="ctr"/>
+          <a:lstStyle/>
+          <a:p>
+            <a:pPr marL="0" indent="0" algn="r">
+              <a:buNone/>
+            </a:pPr>
+            <a:r>
+              <a:rPr lang="en-US" sz="900" dirty="0">
+                <a:solidFill>
+                  <a:srgbClr val="00B4D8"/>
+                </a:solidFill>
+                <a:latin typeface="Calibri" pitchFamily="34" charset="0"/>
+              </a:rPr>
+              <a:t>Platform Capabilities</a:t>
+            </a:r>
+          </a:p>
+        </p:txBody>
+      </p:sp>
+      <p:sp>
+        <p:nvSpPr>
+          <p:cNvPr id="5" name="SlideTitle"/>
+          <p:cNvSpPr/>
+          <p:nvPr/>
+        </p:nvSpPr>
+        <p:spPr>
+          <a:xfrm>
+            <a:off x="457200" y="548640"/>
+            <a:ext cx="8229600" cy="502920"/>
+          </a:xfrm>
+          <a:prstGeom prst="rect">
+            <a:avLst/>
+          </a:prstGeom>
+          <a:noFill/>
+          <a:ln/>
+        </p:spPr>
+        <p:txBody>
+          <a:bodyPr wrap="square" lIns="0" tIns="0" rIns="0" bIns="0" rtlCol="0" anchor="ctr"/>
+          <a:lstStyle/>
+          <a:p>
+            <a:pPr marL="0" indent="0">
+              <a:buNone/>
+            </a:pPr>
+            <a:r>
+              <a:rPr lang="en-US" sz="2000" b="1" dirty="0">
+                <a:solidFill>
+                  <a:srgbClr val="0F2744"/>
+                </a:solidFill>
+                <a:latin typeface="Georgia" pitchFamily="34" charset="0"/>
+              </a:rPr>
+              <a:t>Integrity Analytics — Copy-Paste &amp; Transactional</a:t>
+            </a:r>
+          </a:p>
+        </p:txBody>
+      </p:sp>
+      <p:sp>
+        <p:nvSpPr>
+          <p:cNvPr id="6" name="CardBg_CopyPaste"/>
+          <p:cNvSpPr/>
+          <p:nvPr/>
+        </p:nvSpPr>
+        <p:spPr>
+          <a:xfrm>
+            <a:off x="274320" y="1240000"/>
+            <a:ext cx="4183380" cy="3720000"/>
+          </a:xfrm>
+          <a:prstGeom prst="roundRect">
+            <a:avLst>
+              <a:gd name="adj" fmla="val 30000"/>
+            </a:avLst>
+          </a:prstGeom>
+          <a:solidFill>
+            <a:srgbClr val="FFFFFF"/>
+          </a:solidFill>
+          <a:ln w="12700">
+            <a:solidFill>
+              <a:srgbClr val="D1E3F0"/>
+            </a:solidFill>
+          </a:ln>
+          <a:effectLst>
+            <a:outerShdw blurRad="76200" dist="38100" dir="5400000" algn="ctr" rotWithShape="0">
+              <a:srgbClr val="1A3A5C">
+                <a:alpha val="15000"/>
+              </a:srgbClr>
+            </a:outerShdw>
+          </a:effectLst>
+        </p:spPr>
+      </p:sp>
+      <p:sp>
+        <p:nvSpPr>
+          <p:cNvPr id="7" name="CardHdr_CopyPaste"/>
+          <p:cNvSpPr/>
+          <p:nvPr/>
+        </p:nvSpPr>
+        <p:spPr>
+          <a:xfrm>
+            <a:off x="274320" y="1240000"/>
+            <a:ext cx="4183380" cy="580000"/>
+          </a:xfrm>
+          <a:prstGeom prst="roundRect">
+            <a:avLst>
+              <a:gd name="adj" fmla="val 30000"/>
+            </a:avLst>
+          </a:prstGeom>
+          <a:solidFill>
+            <a:srgbClr val="0F2744"/>
+          </a:solidFill>
+          <a:ln>
+            <a:noFill/>
+          </a:ln>
+        </p:spPr>
+        <p:txBody>
+          <a:bodyPr wrap="square" lIns="91440" tIns="0" rIns="91440" bIns="0" rtlCol="0" anchor="ctr"/>
+          <a:lstStyle/>
+          <a:p>
+            <a:pPr marL="0" indent="0" algn="ctr">
+              <a:buNone/>
+            </a:pPr>
+            <a:r>
+              <a:rPr lang="en-US" sz="1800" b="1" dirty="0">
+                <a:solidFill>
+                  <a:srgbClr val="FFFFFF"/>
+                </a:solidFill>
+                <a:latin typeface="Georgia" pitchFamily="34" charset="0"/>
+              </a:rPr>
+              <a:t>Copy-Paste Fraud</a:t>
+            </a:r>
+          </a:p>
+        </p:txBody>
+      </p:sp>
+      <p:sp>
+        <p:nvSpPr>
+          <p:cNvPr id="8" name="CyanBar_CopyPaste"/>
+          <p:cNvSpPr/>
+          <p:nvPr/>
+        </p:nvSpPr>
+        <p:spPr>
+          <a:xfrm>
+            <a:off x="274320" y="1820000"/>
+            <a:ext cx="54864" cy="3140000"/>
+          </a:xfrm>
+          <a:prstGeom prst="rect">
+            <a:avLst/>
+          </a:prstGeom>
+          <a:solidFill>
+            <a:srgbClr val="00B4D8"/>
+          </a:solidFill>
+          <a:ln>
+            <a:noFill/>
+          </a:ln>
+        </p:spPr>
+      </p:sp>
+      <p:sp>
+        <p:nvSpPr>
+          <p:cNvPr id="9" name="DetectLbl_CopyPaste"/>
+          <p:cNvSpPr/>
+          <p:nvPr/>
+        </p:nvSpPr>
+        <p:spPr>
+          <a:xfrm>
+            <a:off x="429320" y="1920000"/>
+            <a:ext cx="3936940" cy="127000"/>
+          </a:xfrm>
+          <a:prstGeom prst="rect">
+            <a:avLst/>
+          </a:prstGeom>
+          <a:noFill/>
+          <a:ln/>
+        </p:spPr>
+        <p:txBody>
+          <a:bodyPr wrap="square" lIns="0" tIns="0" rIns="0" bIns="0" rtlCol="0" anchor="t"/>
+          <a:lstStyle/>
+          <a:p>
+            <a:pPr marL="0" indent="0">
+              <a:buNone/>
+            </a:pPr>
+            <a:r>
+              <a:rPr lang="en-US" sz="700" b="1" spc="200" dirty="0">
+                <a:solidFill>
+                  <a:srgbClr val="6B7280"/>
+                </a:solidFill>
+                <a:latin typeface="Calibri" pitchFamily="34" charset="0"/>
+              </a:rPr>
+              <a:t>WHAT IT DETECTS</a:t>
+            </a:r>
+          </a:p>
+        </p:txBody>
+      </p:sp>
+      <p:sp>
+        <p:nvSpPr>
+          <p:cNvPr id="10" name="DetectTxt_CopyPaste"/>
+          <p:cNvSpPr/>
+          <p:nvPr/>
+        </p:nvSpPr>
+        <p:spPr>
+          <a:xfrm>
+            <a:off x="429320" y="2060000"/>
+            <a:ext cx="3936940" cy="780000"/>
+          </a:xfrm>
+          <a:prstGeom prst="rect">
+            <a:avLst/>
+          </a:prstGeom>
+          <a:noFill/>
+          <a:ln/>
+        </p:spPr>
+        <p:txBody>
+          <a:bodyPr wrap="square" lIns="0" tIns="0" rIns="0" bIns="0" rtlCol="0" anchor="t"/>
+          <a:lstStyle/>
+          <a:p>
+            <a:pPr marL="0" indent="0">
+              <a:buNone/>
+            </a:pPr>
+            <a:r>
+              <a:rPr lang="en-US" sz="1300" dirty="0">
+                <a:solidFill>
+                  <a:srgbClr val="1A3A5C"/>
+                </a:solidFill>
+                <a:latin typeface="Calibri" pitchFamily="34" charset="0"/>
+              </a:rPr>
+              <a:t>Clusters of near-identical nomination write-ups submitted across different nominators — a hallmark of template-driven fraud where the same justification text is recycled across multiple awards.</a:t>
+            </a:r>
+          </a:p>
+        </p:txBody>
+      </p:sp>
+      <p:sp>
+        <p:nvSpPr>
+          <p:cNvPr id="11" name="Sep_CopyPaste"/>
+          <p:cNvSpPr/>
+          <p:nvPr/>
+        </p:nvSpPr>
+        <p:spPr>
+          <a:xfrm>
+            <a:off x="429320" y="2900000"/>
+            <a:ext cx="3936940" cy="12700"/>
+          </a:xfrm>
+          <a:prstGeom prst="rect">
+            <a:avLst/>
+          </a:prstGeom>
+          <a:solidFill>
+            <a:srgbClr val="E5EDF5"/>
+          </a:solidFill>
+          <a:ln>
+            <a:noFill/>
+          </a:ln>
+        </p:spPr>
+      </p:sp>
+      <p:sp>
+        <p:nvSpPr>
+          <p:cNvPr id="12" name="MethodLbl_CopyPaste"/>
+          <p:cNvSpPr/>
+          <p:nvPr/>
+        </p:nvSpPr>
+        <p:spPr>
+          <a:xfrm>
+            <a:off x="429320" y="2970000"/>
+            <a:ext cx="3936940" cy="127000"/>
+          </a:xfrm>
+          <a:prstGeom prst="rect">
+            <a:avLst/>
+          </a:prstGeom>
+          <a:noFill/>
+          <a:ln/>
+        </p:spPr>
+        <p:txBody>
+          <a:bodyPr wrap="square" lIns="0" tIns="0" rIns="0" bIns="0" rtlCol="0" anchor="t"/>
+          <a:lstStyle/>
+          <a:p>
+            <a:pPr marL="0" indent="0">
+              <a:buNone/>
+            </a:pPr>
+            <a:r>
+              <a:rPr lang="en-US" sz="700" b="1" spc="200" dirty="0">
+                <a:solidFill>
+                  <a:srgbClr val="6B7280"/>
+                </a:solidFill>
+                <a:latin typeface="Calibri" pitchFamily="34" charset="0"/>
+              </a:rPr>
+              <a:t>HOW IT WORKS</a:t>
+            </a:r>
+          </a:p>
+        </p:txBody>
+      </p:sp>
+      <p:sp>
+        <p:nvSpPr>
+          <p:cNvPr id="13" name="MethodTxt_CopyPaste"/>
+          <p:cNvSpPr/>
+          <p:nvPr/>
+        </p:nvSpPr>
+        <p:spPr>
+          <a:xfrm>
+            <a:off x="429320" y="3130000"/>
+            <a:ext cx="3936940" cy="820000"/>
+          </a:xfrm>
+          <a:prstGeom prst="rect">
+            <a:avLst/>
+          </a:prstGeom>
+          <a:noFill/>
+          <a:ln/>
+        </p:spPr>
+        <p:txBody>
+          <a:bodyPr wrap="square" lIns="0" tIns="0" rIns="0" bIns="0" rtlCol="0" anchor="t"/>
+          <a:lstStyle/>
+          <a:p>
+            <a:pPr marL="0" indent="0">
+              <a:buNone/>
+            </a:pPr>
+            <a:r>
+              <a:rPr lang="en-US" sz="1200" dirty="0">
+                <a:solidFill>
+                  <a:srgbClr val="374151"/>
+                </a:solidFill>
+                <a:latin typeface="Calibri" pitchFamily="34" charset="0"/>
+              </a:rPr>
+              <a:t>Sentence-transformer embeddings (all-MiniLM-L6-v2), cosine similarity threshold 0.92. Union-find clusters groups of 3 or more near-duplicate nominations. Embeddings cached in SQL to avoid re-computation on subsequent runs.</a:t>
+            </a:r>
+          </a:p>
+        </p:txBody>
+      </p:sp>
+      <p:sp>
+        <p:nvSpPr>
+          <p:cNvPr id="14" name="Sep2_CopyPaste"/>
+          <p:cNvSpPr/>
+          <p:nvPr/>
+        </p:nvSpPr>
+        <p:spPr>
+          <a:xfrm>
+            <a:off x="429320" y="4010000"/>
+            <a:ext cx="3936940" cy="12700"/>
+          </a:xfrm>
+          <a:prstGeom prst="rect">
+            <a:avLst/>
+          </a:prstGeom>
+          <a:solidFill>
+            <a:srgbClr val="E5EDF5"/>
+          </a:solidFill>
+          <a:ln>
+            <a:noFill/>
+          </a:ln>
+        </p:spPr>
+      </p:sp>
+      <p:sp>
+        <p:nvSpPr>
+          <p:cNvPr id="15" name="SevLbl_CopyPaste"/>
+          <p:cNvSpPr/>
+          <p:nvPr/>
+        </p:nvSpPr>
+        <p:spPr>
+          <a:xfrm>
+            <a:off x="429320" y="4080000"/>
+            <a:ext cx="3936940" cy="127000"/>
+          </a:xfrm>
+          <a:prstGeom prst="rect">
+            <a:avLst/>
+          </a:prstGeom>
+          <a:noFill/>
+          <a:ln/>
+        </p:spPr>
+        <p:txBody>
+          <a:bodyPr wrap="square" lIns="0" tIns="0" rIns="0" bIns="0" rtlCol="0" anchor="t"/>
+          <a:lstStyle/>
+          <a:p>
+            <a:pPr marL="0" indent="0">
+              <a:buNone/>
+            </a:pPr>
+            <a:r>
+              <a:rPr lang="en-US" sz="700" b="1" spc="200" dirty="0">
+                <a:solidFill>
+                  <a:srgbClr val="6B7280"/>
+                </a:solidFill>
+                <a:latin typeface="Calibri" pitchFamily="34" charset="0"/>
+              </a:rPr>
+              <a:t>SEVERITY LEVELS</a:t>
+            </a:r>
+          </a:p>
+        </p:txBody>
+      </p:sp>
+      <p:sp>
+        <p:nvSpPr>
+          <p:cNvPr id="16" name="Pill_CopyPaste_HIGH"/>
+          <p:cNvSpPr/>
+          <p:nvPr/>
+        </p:nvSpPr>
+        <p:spPr>
+          <a:xfrm>
+            <a:off x="429320" y="4250000"/>
+            <a:ext cx="780000" cy="240000"/>
+          </a:xfrm>
+          <a:prstGeom prst="roundRect">
+            <a:avLst>
+              <a:gd name="adj" fmla="val 50000"/>
+            </a:avLst>
+          </a:prstGeom>
+          <a:solidFill>
+            <a:srgbClr val="D97706"/>
+          </a:solidFill>
+          <a:ln>
+            <a:noFill/>
+          </a:ln>
+        </p:spPr>
+        <p:txBody>
+          <a:bodyPr wrap="square" lIns="60960" tIns="0" rIns="60960" bIns="0" rtlCol="0" anchor="ctr"/>
+          <a:lstStyle/>
+          <a:p>
+            <a:pPr marL="0" indent="0" algn="ctr">
+              <a:buNone/>
+            </a:pPr>
+            <a:r>
+              <a:rPr lang="en-US" sz="800" b="1" spc="100" dirty="0">
+                <a:solidFill>
+                  <a:srgbClr val="FFFFFF"/>
+                </a:solidFill>
+                <a:latin typeface="Calibri" pitchFamily="34" charset="0"/>
+              </a:rPr>
+              <a:t>HIGH</a:t>
+            </a:r>
+          </a:p>
+        </p:txBody>
+      </p:sp>
+      <p:sp>
+        <p:nvSpPr>
+          <p:cNvPr id="17" name="CardBg_Transactional"/>
+          <p:cNvSpPr/>
+          <p:nvPr/>
+        </p:nvSpPr>
+        <p:spPr>
+          <a:xfrm>
+            <a:off x="4686300" y="1240000"/>
+            <a:ext cx="4183380" cy="3720000"/>
+          </a:xfrm>
+          <a:prstGeom prst="roundRect">
+            <a:avLst>
+              <a:gd name="adj" fmla="val 30000"/>
+            </a:avLst>
+          </a:prstGeom>
+          <a:solidFill>
+            <a:srgbClr val="FFFFFF"/>
+          </a:solidFill>
+          <a:ln w="12700">
+            <a:solidFill>
+              <a:srgbClr val="D1E3F0"/>
+            </a:solidFill>
+          </a:ln>
+          <a:effectLst>
+            <a:outerShdw blurRad="76200" dist="38100" dir="5400000" algn="ctr" rotWithShape="0">
+              <a:srgbClr val="1A3A5C">
+                <a:alpha val="15000"/>
+              </a:srgbClr>
+            </a:outerShdw>
+          </a:effectLst>
+        </p:spPr>
+      </p:sp>
+      <p:sp>
+        <p:nvSpPr>
+          <p:cNvPr id="18" name="CardHdr_Transactional"/>
+          <p:cNvSpPr/>
+          <p:nvPr/>
+        </p:nvSpPr>
+        <p:spPr>
+          <a:xfrm>
+            <a:off x="4686300" y="1240000"/>
+            <a:ext cx="4183380" cy="580000"/>
+          </a:xfrm>
+          <a:prstGeom prst="roundRect">
+            <a:avLst>
+              <a:gd name="adj" fmla="val 30000"/>
+            </a:avLst>
+          </a:prstGeom>
+          <a:solidFill>
+            <a:srgbClr val="00B4D8"/>
+          </a:solidFill>
+          <a:ln>
+            <a:noFill/>
+          </a:ln>
+        </p:spPr>
+        <p:txBody>
+          <a:bodyPr wrap="square" lIns="91440" tIns="0" rIns="91440" bIns="0" rtlCol="0" anchor="ctr"/>
+          <a:lstStyle/>
+          <a:p>
+            <a:pPr marL="0" indent="0" algn="ctr">
+              <a:buNone/>
+            </a:pPr>
+            <a:r>
+              <a:rPr lang="en-US" sz="1800" b="1" dirty="0">
+                <a:solidFill>
+                  <a:srgbClr val="FFFFFF"/>
+                </a:solidFill>
+                <a:latin typeface="Georgia" pitchFamily="34" charset="0"/>
+              </a:rPr>
+              <a:t>Transactional Language</a:t>
+            </a:r>
+          </a:p>
+        </p:txBody>
+      </p:sp>
+      <p:sp>
+        <p:nvSpPr>
+          <p:cNvPr id="19" name="CyanBar_Transactional"/>
+          <p:cNvSpPr/>
+          <p:nvPr/>
+        </p:nvSpPr>
+        <p:spPr>
+          <a:xfrm>
+            <a:off x="4686300" y="1820000"/>
+            <a:ext cx="54864" cy="3140000"/>
+          </a:xfrm>
+          <a:prstGeom prst="rect">
+            <a:avLst/>
+          </a:prstGeom>
+          <a:solidFill>
+            <a:srgbClr val="00B4D8"/>
+          </a:solidFill>
+          <a:ln>
+            <a:noFill/>
+          </a:ln>
+        </p:spPr>
+      </p:sp>
+      <p:sp>
+        <p:nvSpPr>
+          <p:cNvPr id="20" name="DetectLbl_Transactional"/>
+          <p:cNvSpPr/>
+          <p:nvPr/>
+        </p:nvSpPr>
+        <p:spPr>
+          <a:xfrm>
+            <a:off x="4841300" y="1920000"/>
+            <a:ext cx="3936940" cy="127000"/>
+          </a:xfrm>
+          <a:prstGeom prst="rect">
+            <a:avLst/>
+          </a:prstGeom>
+          <a:noFill/>
+          <a:ln/>
+        </p:spPr>
+        <p:txBody>
+          <a:bodyPr wrap="square" lIns="0" tIns="0" rIns="0" bIns="0" rtlCol="0" anchor="t"/>
+          <a:lstStyle/>
+          <a:p>
+            <a:pPr marL="0" indent="0">
+              <a:buNone/>
+            </a:pPr>
+            <a:r>
+              <a:rPr lang="en-US" sz="700" b="1" spc="200" dirty="0">
+                <a:solidFill>
+                  <a:srgbClr val="6B7280"/>
+                </a:solidFill>
+                <a:latin typeface="Calibri" pitchFamily="34" charset="0"/>
+              </a:rPr>
+              <a:t>WHAT IT DETECTS</a:t>
+            </a:r>
+          </a:p>
+        </p:txBody>
+      </p:sp>
+      <p:sp>
+        <p:nvSpPr>
+          <p:cNvPr id="21" name="DetectTxt_Transactional"/>
+          <p:cNvSpPr/>
+          <p:nvPr/>
+        </p:nvSpPr>
+        <p:spPr>
+          <a:xfrm>
+            <a:off x="4841300" y="2060000"/>
+            <a:ext cx="3936940" cy="780000"/>
+          </a:xfrm>
+          <a:prstGeom prst="rect">
+            <a:avLst/>
+          </a:prstGeom>
+          <a:noFill/>
+          <a:ln/>
+        </p:spPr>
+        <p:txBody>
+          <a:bodyPr wrap="square" lIns="0" tIns="0" rIns="0" bIns="0" rtlCol="0" anchor="t"/>
+          <a:lstStyle/>
+          <a:p>
+            <a:pPr marL="0" indent="0">
+              <a:buNone/>
+            </a:pPr>
+            <a:r>
+              <a:rPr lang="en-US" sz="1300" dirty="0">
+                <a:solidFill>
+                  <a:srgbClr val="1A3A5C"/>
+                </a:solidFill>
+                <a:latin typeface="Calibri" pitchFamily="34" charset="0"/>
+              </a:rPr>
+              <a:t>Quid-pro-quo phrasing inside nomination text — phrases like "in exchange for" or "I will return the favour" that signal explicit or implied reciprocity agreements between colleagues.</a:t>
+            </a:r>
+          </a:p>
+        </p:txBody>
+      </p:sp>
+      <p:sp>
+        <p:nvSpPr>
+          <p:cNvPr id="22" name="Sep_Transactional"/>
+          <p:cNvSpPr/>
+          <p:nvPr/>
+        </p:nvSpPr>
+        <p:spPr>
+          <a:xfrm>
+            <a:off x="4841300" y="2900000"/>
+            <a:ext cx="3936940" cy="12700"/>
+          </a:xfrm>
+          <a:prstGeom prst="rect">
+            <a:avLst/>
+          </a:prstGeom>
+          <a:solidFill>
+            <a:srgbClr val="E5EDF5"/>
+          </a:solidFill>
+          <a:ln>
+            <a:noFill/>
+          </a:ln>
+        </p:spPr>
+      </p:sp>
+      <p:sp>
+        <p:nvSpPr>
+          <p:cNvPr id="23" name="MethodLbl_Transactional"/>
+          <p:cNvSpPr/>
+          <p:nvPr/>
+        </p:nvSpPr>
+        <p:spPr>
+          <a:xfrm>
+            <a:off x="4841300" y="2970000"/>
+            <a:ext cx="3936940" cy="127000"/>
+          </a:xfrm>
+          <a:prstGeom prst="rect">
+            <a:avLst/>
+          </a:prstGeom>
+          <a:noFill/>
+          <a:ln/>
+        </p:spPr>
+        <p:txBody>
+          <a:bodyPr wrap="square" lIns="0" tIns="0" rIns="0" bIns="0" rtlCol="0" anchor="t"/>
+          <a:lstStyle/>
+          <a:p>
+            <a:pPr marL="0" indent="0">
+              <a:buNone/>
+            </a:pPr>
+            <a:r>
+              <a:rPr lang="en-US" sz="700" b="1" spc="200" dirty="0">
+                <a:solidFill>
+                  <a:srgbClr val="6B7280"/>
+                </a:solidFill>
+                <a:latin typeface="Calibri" pitchFamily="34" charset="0"/>
+              </a:rPr>
+              <a:t>HOW IT WORKS</a:t>
+            </a:r>
+          </a:p>
+        </p:txBody>
+      </p:sp>
+      <p:sp>
+        <p:nvSpPr>
+          <p:cNvPr id="24" name="MethodTxt_Transactional"/>
+          <p:cNvSpPr/>
+          <p:nvPr/>
+        </p:nvSpPr>
+        <p:spPr>
+          <a:xfrm>
+            <a:off x="4841300" y="3130000"/>
+            <a:ext cx="3936940" cy="820000"/>
+          </a:xfrm>
+          <a:prstGeom prst="rect">
+            <a:avLst/>
+          </a:prstGeom>
+          <a:noFill/>
+          <a:ln/>
+        </p:spPr>
+        <p:txBody>
+          <a:bodyPr wrap="square" lIns="0" tIns="0" rIns="0" bIns="0" rtlCol="0" anchor="t"/>
+          <a:lstStyle/>
+          <a:p>
+            <a:pPr marL="0" indent="0">
+              <a:buNone/>
+            </a:pPr>
+            <a:r>
+              <a:rPr lang="en-US" sz="1200" dirty="0">
+                <a:solidFill>
+                  <a:srgbClr val="374151"/>
+                </a:solidFill>
+                <a:latin typeface="Calibri" pitchFamily="34" charset="0"/>
+              </a:rPr>
+              <a:t>Regex pattern library scans nomination descriptions for personal-benefit phrases. Minimum 2 hits required to flag, reducing false positives. High severity at 4 or more hits, Medium at 2 to 3 hits.</a:t>
+            </a:r>
+          </a:p>
+        </p:txBody>
+      </p:sp>
+      <p:sp>
+        <p:nvSpPr>
+          <p:cNvPr id="25" name="Sep2_Transactional"/>
+          <p:cNvSpPr/>
+          <p:nvPr/>
+        </p:nvSpPr>
+        <p:spPr>
+          <a:xfrm>
+            <a:off x="4841300" y="4010000"/>
+            <a:ext cx="3936940" cy="12700"/>
+          </a:xfrm>
+          <a:prstGeom prst="rect">
+            <a:avLst/>
+          </a:prstGeom>
+          <a:solidFill>
+            <a:srgbClr val="E5EDF5"/>
+          </a:solidFill>
+          <a:ln>
+            <a:noFill/>
+          </a:ln>
+        </p:spPr>
+      </p:sp>
+      <p:sp>
+        <p:nvSpPr>
+          <p:cNvPr id="26" name="SevLbl_Transactional"/>
+          <p:cNvSpPr/>
+          <p:nvPr/>
+        </p:nvSpPr>
+        <p:spPr>
+          <a:xfrm>
+            <a:off x="4841300" y="4080000"/>
+            <a:ext cx="3936940" cy="127000"/>
+          </a:xfrm>
+          <a:prstGeom prst="rect">
+            <a:avLst/>
+          </a:prstGeom>
+          <a:noFill/>
+          <a:ln/>
+        </p:spPr>
+        <p:txBody>
+          <a:bodyPr wrap="square" lIns="0" tIns="0" rIns="0" bIns="0" rtlCol="0" anchor="t"/>
+          <a:lstStyle/>
+          <a:p>
+            <a:pPr marL="0" indent="0">
+              <a:buNone/>
+            </a:pPr>
+            <a:r>
+              <a:rPr lang="en-US" sz="700" b="1" spc="200" dirty="0">
+                <a:solidFill>
+                  <a:srgbClr val="6B7280"/>
+                </a:solidFill>
+                <a:latin typeface="Calibri" pitchFamily="34" charset="0"/>
+              </a:rPr>
+              <a:t>SEVERITY LEVELS</a:t>
+            </a:r>
+          </a:p>
+        </p:txBody>
+      </p:sp>
+      <p:sp>
+        <p:nvSpPr>
+          <p:cNvPr id="27" name="Pill_Transactional_HIGH"/>
+          <p:cNvSpPr/>
+          <p:nvPr/>
+        </p:nvSpPr>
+        <p:spPr>
+          <a:xfrm>
+            <a:off x="4841300" y="4250000"/>
+            <a:ext cx="780000" cy="240000"/>
+          </a:xfrm>
+          <a:prstGeom prst="roundRect">
+            <a:avLst>
+              <a:gd name="adj" fmla="val 50000"/>
+            </a:avLst>
+          </a:prstGeom>
+          <a:solidFill>
+            <a:srgbClr val="D97706"/>
+          </a:solidFill>
+          <a:ln>
+            <a:noFill/>
+          </a:ln>
+        </p:spPr>
+        <p:txBody>
+          <a:bodyPr wrap="square" lIns="60960" tIns="0" rIns="60960" bIns="0" rtlCol="0" anchor="ctr"/>
+          <a:lstStyle/>
+          <a:p>
+            <a:pPr marL="0" indent="0" algn="ctr">
+              <a:buNone/>
+            </a:pPr>
+            <a:r>
+              <a:rPr lang="en-US" sz="800" b="1" spc="100" dirty="0">
+                <a:solidFill>
+                  <a:srgbClr val="FFFFFF"/>
+                </a:solidFill>
+                <a:latin typeface="Calibri" pitchFamily="34" charset="0"/>
+              </a:rPr>
+              <a:t>HIGH</a:t>
+            </a:r>
+          </a:p>
+        </p:txBody>
+      </p:sp>
+      <p:sp>
+        <p:nvSpPr>
+          <p:cNvPr id="28" name="Pill_Transactional_MEDIUM"/>
+          <p:cNvSpPr/>
+          <p:nvPr/>
+        </p:nvSpPr>
+        <p:spPr>
+          <a:xfrm>
+            <a:off x="5691300" y="4250000"/>
+            <a:ext cx="780000" cy="240000"/>
+          </a:xfrm>
+          <a:prstGeom prst="roundRect">
+            <a:avLst>
+              <a:gd name="adj" fmla="val 50000"/>
+            </a:avLst>
+          </a:prstGeom>
+          <a:solidFill>
+            <a:srgbClr val="0369A1"/>
+          </a:solidFill>
+          <a:ln>
+            <a:noFill/>
+          </a:ln>
+        </p:spPr>
+        <p:txBody>
+          <a:bodyPr wrap="square" lIns="60960" tIns="0" rIns="60960" bIns="0" rtlCol="0" anchor="ctr"/>
+          <a:lstStyle/>
+          <a:p>
+            <a:pPr marL="0" indent="0" algn="ctr">
+              <a:buNone/>
+            </a:pPr>
+            <a:r>
+              <a:rPr lang="en-US" sz="800" b="1" spc="100" dirty="0">
+                <a:solidFill>
+                  <a:srgbClr val="FFFFFF"/>
+                </a:solidFill>
+                <a:latin typeface="Calibri" pitchFamily="34" charset="0"/>
+              </a:rPr>
+              <a:t>MEDIUM</a:t>
+            </a:r>
+          </a:p>
+        </p:txBody>
+      </p:sp>
     </p:spTree>
   </p:cSld>
   <p:clrMapOvr>

--- a/blob_templates/award_nomination_onboarding_template.pptx
+++ b/blob_templates/award_nomination_onboarding_template.pptx
@@ -1994,7 +1994,7 @@
                 <a:ea typeface="Calibri" pitchFamily="34" charset="-122"/>
                 <a:cs typeface="Calibri" pitchFamily="34" charset="-120"/>
               </a:rPr>
-              <a:t>Provided by:  Terian Services</a:t>
+              <a:t>Provided by:  Terianix.ai</a:t>
             </a:r>
             <a:endParaRPr lang="en-US" sz="1000" dirty="0"/>
           </a:p>
@@ -2316,7 +2316,7 @@
                 <a:ea typeface="Calibri" pitchFamily="34" charset="-122"/>
                 <a:cs typeface="Calibri" pitchFamily="34" charset="-120"/>
               </a:rPr>
-              <a:t>terian-services.com  |  sales@terian-services.com</a:t>
+              <a:t>terianix.ai  |  sales@terian-services.com</a:t>
             </a:r>
             <a:endParaRPr lang="en-US" sz="900" dirty="0"/>
           </a:p>
@@ -2413,7 +2413,7 @@
                 <a:ea typeface="Calibri" pitchFamily="34" charset="-122"/>
                 <a:cs typeface="Calibri" pitchFamily="34" charset="-120"/>
               </a:rPr>
-              <a:t>Provided by:  Terian Services</a:t>
+              <a:t>Provided by:  Terianix.ai</a:t>
             </a:r>
             <a:endParaRPr lang="en-US" sz="1000" dirty="0"/>
           </a:p>
@@ -3872,7 +3872,7 @@
                 <a:ea typeface="Calibri" pitchFamily="34" charset="-122"/>
                 <a:cs typeface="Calibri" pitchFamily="34" charset="-120"/>
               </a:rPr>
-              <a:t>Provided by:  Terian Services</a:t>
+              <a:t>Provided by:  Terianix.ai</a:t>
             </a:r>
             <a:endParaRPr lang="en-US" sz="1000" dirty="0"/>
           </a:p>
@@ -4288,7 +4288,7 @@
                 <a:ea typeface="Calibri" pitchFamily="34" charset="-122"/>
                 <a:cs typeface="Calibri" pitchFamily="34" charset="-120"/>
               </a:rPr>
-              <a:t>Terian Services creates the tenant DB record, provisions the custom subdomain ({{CLIENT_SUBDOMAIN}}.terian-services.com), and configures DNS.</a:t>
+              <a:t>Terianix.ai creates the tenant DB record, provisions the custom subdomain ({{CLIENT_SUBDOMAIN}}-awards.terianix.ai), and configures DNS.</a:t>
             </a:r>
             <a:endParaRPr lang="en-US" sz="1000" dirty="0"/>
           </a:p>
@@ -4795,7 +4795,7 @@
                 <a:ea typeface="Calibri" pitchFamily="34" charset="-122"/>
                 <a:cs typeface="Calibri" pitchFamily="34" charset="-120"/>
               </a:rPr>
-              <a:t>✓  {{CLIENT_SUBDOMAIN}}.terian-services.com live</a:t>
+              <a:t>✓  {{CLIENT_SUBDOMAIN}}-awards.terianix.ai live</a:t>
             </a:r>
             <a:endParaRPr lang="en-US" sz="1050" dirty="0"/>
           </a:p>
@@ -5010,7 +5010,7 @@
                 <a:ea typeface="Calibri" pitchFamily="34" charset="-122"/>
                 <a:cs typeface="Calibri" pitchFamily="34" charset="-120"/>
               </a:rPr>
-              <a:t>Terian Services manages all provisioning tasks. {{CLIENT_NAME}} provides: Azure AD tenant ID, brand assets (logo, hex colour), and employee CSV. No infrastructure setup required on your side.</a:t>
+              <a:t>Terianix.ai manages all provisioning tasks. {{CLIENT_NAME}} provides: Azure AD tenant ID, brand assets (logo, hex colour), and employee CSV. No infrastructure setup required on your side.</a:t>
             </a:r>
             <a:endParaRPr lang="en-US" sz="1000" dirty="0"/>
           </a:p>
@@ -5107,7 +5107,7 @@
                 <a:ea typeface="Calibri" pitchFamily="34" charset="-122"/>
                 <a:cs typeface="Calibri" pitchFamily="34" charset="-120"/>
               </a:rPr>
-              <a:t>Provided by:  Terian Services</a:t>
+              <a:t>Provided by:  Terianix.ai</a:t>
             </a:r>
             <a:endParaRPr lang="en-US" sz="1000" dirty="0"/>
           </a:p>
@@ -5588,7 +5588,7 @@
                 <a:ea typeface="Calibri" pitchFamily="34" charset="-122"/>
                 <a:cs typeface="Calibri" pitchFamily="34" charset="-120"/>
               </a:rPr>
-              <a:t>Terian resolves all raised issues within SLA. Formal sign-off document issued.</a:t>
+              <a:t>Terianix.ai resolves all raised issues within SLA. Formal sign-off document issued.</a:t>
             </a:r>
             <a:endParaRPr lang="en-US" sz="950" dirty="0"/>
           </a:p>
@@ -6480,7 +6480,7 @@
                 <a:ea typeface="Calibri" pitchFamily="34" charset="-122"/>
                 <a:cs typeface="Calibri" pitchFamily="34" charset="-120"/>
               </a:rPr>
-              <a:t>Provided by:  Terian Services</a:t>
+              <a:t>Provided by:  Terianix.ai</a:t>
             </a:r>
             <a:endParaRPr lang="en-US" sz="1000" dirty="0"/>
           </a:p>
@@ -7822,7 +7822,7 @@
                 <a:ea typeface="Calibri" pitchFamily="34" charset="-122"/>
                 <a:cs typeface="Calibri" pitchFamily="34" charset="-120"/>
               </a:rPr>
-              <a:t>Application bugs and incident resolution  </a:t>
+              <a:t xml:space="preserve">Application bugs and incident resolution  </a:t>
             </a:r>
             <a:endParaRPr lang="en-US" sz="950" dirty="0"/>
           </a:p>
@@ -7840,7 +7840,7 @@
                 <a:ea typeface="Calibri" pitchFamily="34" charset="-122"/>
                 <a:cs typeface="Calibri" pitchFamily="34" charset="-120"/>
               </a:rPr>
-              <a:t>User and admin account management  </a:t>
+              <a:t xml:space="preserve">User and admin account management  </a:t>
             </a:r>
             <a:endParaRPr lang="en-US" sz="950" dirty="0"/>
           </a:p>
@@ -7858,7 +7858,7 @@
                 <a:ea typeface="Calibri" pitchFamily="34" charset="-122"/>
                 <a:cs typeface="Calibri" pitchFamily="34" charset="-120"/>
               </a:rPr>
-              <a:t>Fraud model retraining (quarterly or on demand)  </a:t>
+              <a:t xml:space="preserve">Fraud model retraining (quarterly or on demand)  </a:t>
             </a:r>
             <a:endParaRPr lang="en-US" sz="950" dirty="0"/>
           </a:p>
@@ -7876,7 +7876,7 @@
                 <a:ea typeface="Calibri" pitchFamily="34" charset="-122"/>
                 <a:cs typeface="Calibri" pitchFamily="34" charset="-120"/>
               </a:rPr>
-              <a:t>Minor configuration changes (locale, theme, roles)  </a:t>
+              <a:t xml:space="preserve">Minor configuration changes (locale, theme, roles)  </a:t>
             </a:r>
             <a:endParaRPr lang="en-US" sz="950" dirty="0"/>
           </a:p>
@@ -7980,7 +7980,7 @@
                 <a:ea typeface="Calibri" pitchFamily="34" charset="-122"/>
                 <a:cs typeface="Calibri" pitchFamily="34" charset="-120"/>
               </a:rPr>
-              <a:t>Scheduled: Sundays 02:00–04:00 UTC  </a:t>
+              <a:t xml:space="preserve">Scheduled: Sundays 02:00–04:00 UTC  </a:t>
             </a:r>
             <a:endParaRPr lang="en-US" sz="950" dirty="0"/>
           </a:p>
@@ -7998,7 +7998,7 @@
                 <a:ea typeface="Calibri" pitchFamily="34" charset="-122"/>
                 <a:cs typeface="Calibri" pitchFamily="34" charset="-120"/>
               </a:rPr>
-              <a:t>48-hour advance notice for planned downtime  </a:t>
+              <a:t xml:space="preserve">48-hour advance notice for planned downtime  </a:t>
             </a:r>
             <a:endParaRPr lang="en-US" sz="950" dirty="0"/>
           </a:p>
@@ -8016,7 +8016,7 @@
                 <a:ea typeface="Calibri" pitchFamily="34" charset="-122"/>
                 <a:cs typeface="Calibri" pitchFamily="34" charset="-120"/>
               </a:rPr>
-              <a:t>Zero-downtime deploys via blue/green (target)  </a:t>
+              <a:t xml:space="preserve">Zero-downtime deploys via blue/green (target)  </a:t>
             </a:r>
             <a:endParaRPr lang="en-US" sz="950" dirty="0"/>
           </a:p>
@@ -8034,7 +8034,7 @@
                 <a:ea typeface="Calibri" pitchFamily="34" charset="-122"/>
                 <a:cs typeface="Calibri" pitchFamily="34" charset="-120"/>
               </a:rPr>
-              <a:t>Emergency patches applied outside windows as needed  </a:t>
+              <a:t xml:space="preserve">Emergency patches applied outside windows as needed  </a:t>
             </a:r>
             <a:endParaRPr lang="en-US" sz="950" dirty="0"/>
           </a:p>
@@ -8131,7 +8131,7 @@
                 <a:ea typeface="Calibri" pitchFamily="34" charset="-122"/>
                 <a:cs typeface="Calibri" pitchFamily="34" charset="-120"/>
               </a:rPr>
-              <a:t>Provided by:  Terian Services</a:t>
+              <a:t>Provided by:  Terianix.ai</a:t>
             </a:r>
             <a:endParaRPr lang="en-US" sz="1000" dirty="0"/>
           </a:p>
@@ -8417,7 +8417,7 @@
                 <a:ea typeface="Calibri" pitchFamily="34" charset="-122"/>
                 <a:cs typeface="Calibri" pitchFamily="34" charset="-120"/>
               </a:rPr>
-              <a:t>Sign the Terian Services SaaS Pilot Agreement (30-day no-obligation pilot). No infrastructure commitment required. Covers data privacy, uptime commitment, and support scope.</a:t>
+              <a:t>Sign the Terianix.ai SaaS Pilot Agreement (30-day no-obligation pilot). No infrastructure commitment required. Covers data privacy, uptime commitment, and support scope.</a:t>
             </a:r>
             <a:endParaRPr lang="en-US" sz="1000" dirty="0"/>
           </a:p>
@@ -8586,7 +8586,7 @@
                 <a:ea typeface="Calibri" pitchFamily="34" charset="-122"/>
                 <a:cs typeface="Calibri" pitchFamily="34" charset="-120"/>
               </a:rPr>
-              <a:t>Share your Azure AD tenant ID, primary brand colour (hex), company logo (PNG), and an employee CSV (name, email, manager email). Terian handles everything from there.</a:t>
+              <a:t>Share your Azure AD tenant ID, primary brand colour (hex), company logo (PNG), and an employee CSV (name, email, manager email). Terianix.ai handles everything from there.</a:t>
             </a:r>
             <a:endParaRPr lang="en-US" sz="1000" dirty="0"/>
           </a:p>
@@ -8755,7 +8755,7 @@
                 <a:ea typeface="Calibri" pitchFamily="34" charset="-122"/>
                 <a:cs typeface="Calibri" pitchFamily="34" charset="-120"/>
               </a:rPr>
-              <a:t>Schedule a 60-minute kick-off call with Terian Services. We'll confirm all requirements, walk through the sandbox live, and set the go-live target date.</a:t>
+              <a:t>Schedule a 60-minute kick-off call with Terianix.ai. We'll confirm all requirements, walk through the sandbox live, and set the go-live target date.</a:t>
             </a:r>
             <a:endParaRPr lang="en-US" sz="1000" dirty="0"/>
           </a:p>
@@ -8819,7 +8819,7 @@
                 <a:ea typeface="Calibri" pitchFamily="34" charset="-122"/>
                 <a:cs typeface="Calibri" pitchFamily="34" charset="-120"/>
               </a:rPr>
-              <a:t>Contact:  Terian Services  ·  sales@terian-services.com  ·  terian-services.com</a:t>
+              <a:t>Contact:  Terianix.ai  ·  sales@terian-services.com  ·  terianix.ai</a:t>
             </a:r>
             <a:endParaRPr lang="en-US" sz="1050" dirty="0"/>
           </a:p>
@@ -8966,7 +8966,7 @@
                 <a:ea typeface="Calibri" pitchFamily="34" charset="-122"/>
                 <a:cs typeface="Calibri" pitchFamily="34" charset="-120"/>
               </a:rPr>
-              <a:t>Provided by:  Terian Services</a:t>
+              <a:t>Provided by:  Terianix.ai</a:t>
             </a:r>
             <a:endParaRPr lang="en-US" sz="1000" dirty="0"/>
           </a:p>
@@ -9288,7 +9288,7 @@
                 <a:ea typeface="Calibri" pitchFamily="34" charset="-122"/>
                 <a:cs typeface="Calibri" pitchFamily="34" charset="-120"/>
               </a:rPr>
-              <a:t>terian-services.com</a:t>
+              <a:t>terianix.ai</a:t>
             </a:r>
             <a:endParaRPr lang="en-US" sz="1300" dirty="0"/>
           </a:p>
@@ -9449,7 +9449,7 @@
                 <a:ea typeface="Calibri" pitchFamily="34" charset="-122"/>
                 <a:cs typeface="Calibri" pitchFamily="34" charset="-120"/>
               </a:rPr>
-              <a:t>Provided by: Terian Services</a:t>
+              <a:t>Provided by: Terianix.ai</a:t>
             </a:r>
             <a:endParaRPr lang="en-US" sz="1100" dirty="0"/>
           </a:p>
@@ -9655,7 +9655,7 @@
                 <a:ea typeface="Calibri" pitchFamily="34" charset="-122"/>
                 <a:cs typeface="Calibri" pitchFamily="34" charset="-120"/>
               </a:rPr>
-              <a:t>CONFIDENTIAL — {{CLIENT_NAME}} Onboarding  |  © 2025 Terian Services</a:t>
+              <a:t>CONFIDENTIAL — {{CLIENT_NAME}} Onboarding  |  © 2025 Terianix.ai</a:t>
             </a:r>
             <a:endParaRPr lang="en-US" sz="750" dirty="0"/>
           </a:p>
@@ -9777,7 +9777,7 @@
                 <a:ea typeface="Calibri" pitchFamily="34" charset="-122"/>
                 <a:cs typeface="Calibri" pitchFamily="34" charset="-120"/>
               </a:rPr>
-              <a:t>Provided by: Terian Services</a:t>
+              <a:t>Provided by: Terianix.ai</a:t>
             </a:r>
             <a:endParaRPr lang="en-US" sz="1100" dirty="0"/>
           </a:p>
@@ -10209,7 +10209,7 @@
                 <a:ea typeface="Calibri" pitchFamily="34" charset="-122"/>
                 <a:cs typeface="Calibri" pitchFamily="34" charset="-120"/>
               </a:rPr>
-              <a:t>CONFIDENTIAL — {{CLIENT_NAME}} Onboarding  |  © 2025 Terian Services</a:t>
+              <a:t>CONFIDENTIAL — {{CLIENT_NAME}} Onboarding  |  © 2025 Terianix.ai</a:t>
             </a:r>
             <a:endParaRPr lang="en-US" sz="750" dirty="0"/>
           </a:p>
@@ -10331,7 +10331,7 @@
                 <a:ea typeface="Calibri" pitchFamily="34" charset="-122"/>
                 <a:cs typeface="Calibri" pitchFamily="34" charset="-120"/>
               </a:rPr>
-              <a:t>Provided by: Terian Services</a:t>
+              <a:t>Provided by: Terianix.ai</a:t>
             </a:r>
             <a:endParaRPr lang="en-US" sz="1100" dirty="0"/>
           </a:p>
@@ -10611,7 +10611,7 @@
                 <a:ea typeface="Calibri" pitchFamily="34" charset="-122"/>
                 <a:cs typeface="Calibri" pitchFamily="34" charset="-120"/>
               </a:rPr>
-              <a:t>CONFIDENTIAL — {{CLIENT_NAME}} Onboarding  |  © 2025 Terian Services</a:t>
+              <a:t>CONFIDENTIAL — {{CLIENT_NAME}} Onboarding  |  © 2025 Terianix.ai</a:t>
             </a:r>
             <a:endParaRPr lang="en-US" sz="750" dirty="0"/>
           </a:p>
@@ -10733,7 +10733,7 @@
                 <a:ea typeface="Calibri" pitchFamily="34" charset="-122"/>
                 <a:cs typeface="Calibri" pitchFamily="34" charset="-120"/>
               </a:rPr>
-              <a:t>Provided by: Terian Services</a:t>
+              <a:t>Provided by: Terianix.ai</a:t>
             </a:r>
             <a:endParaRPr lang="en-US" sz="1100" dirty="0"/>
           </a:p>
@@ -11013,7 +11013,7 @@
                 <a:ea typeface="Calibri" pitchFamily="34" charset="-122"/>
                 <a:cs typeface="Calibri" pitchFamily="34" charset="-120"/>
               </a:rPr>
-              <a:t>CONFIDENTIAL — {{CLIENT_NAME}} Onboarding  |  © 2025 Terian Services</a:t>
+              <a:t>CONFIDENTIAL — {{CLIENT_NAME}} Onboarding  |  © 2025 Terianix.ai</a:t>
             </a:r>
             <a:endParaRPr lang="en-US" sz="750" dirty="0"/>
           </a:p>
@@ -11110,7 +11110,7 @@
                 <a:ea typeface="Calibri" pitchFamily="34" charset="-122"/>
                 <a:cs typeface="Calibri" pitchFamily="34" charset="-120"/>
               </a:rPr>
-              <a:t>Provided by:  Terian Services</a:t>
+              <a:t>Provided by:  Terianix.ai</a:t>
             </a:r>
             <a:endParaRPr lang="en-US" sz="1000" dirty="0"/>
           </a:p>
@@ -12343,7 +12343,7 @@
                 <a:ea typeface="Calibri" pitchFamily="34" charset="-122"/>
                 <a:cs typeface="Calibri" pitchFamily="34" charset="-120"/>
               </a:rPr>
-              <a:t>Provided by: Terian Services</a:t>
+              <a:t>Provided by: Terianix.ai</a:t>
             </a:r>
             <a:endParaRPr lang="en-US" sz="1100" dirty="0"/>
           </a:p>
@@ -12623,7 +12623,7 @@
                 <a:ea typeface="Calibri" pitchFamily="34" charset="-122"/>
                 <a:cs typeface="Calibri" pitchFamily="34" charset="-120"/>
               </a:rPr>
-              <a:t>CONFIDENTIAL — {{CLIENT_NAME}} Onboarding  |  © 2025 Terian Services</a:t>
+              <a:t>CONFIDENTIAL — {{CLIENT_NAME}} Onboarding  |  © 2025 Terianix.ai</a:t>
             </a:r>
             <a:endParaRPr lang="en-US" sz="750" dirty="0"/>
           </a:p>
@@ -12745,7 +12745,7 @@
                 <a:ea typeface="Calibri" pitchFamily="34" charset="-122"/>
                 <a:cs typeface="Calibri" pitchFamily="34" charset="-120"/>
               </a:rPr>
-              <a:t>Provided by: Terian Services</a:t>
+              <a:t>Provided by: Terianix.ai</a:t>
             </a:r>
             <a:endParaRPr lang="en-US" sz="1100" dirty="0"/>
           </a:p>
@@ -13025,7 +13025,7 @@
                 <a:ea typeface="Calibri" pitchFamily="34" charset="-122"/>
                 <a:cs typeface="Calibri" pitchFamily="34" charset="-120"/>
               </a:rPr>
-              <a:t>CONFIDENTIAL — {{CLIENT_NAME}} Onboarding  |  © 2025 Terian Services</a:t>
+              <a:t>CONFIDENTIAL — {{CLIENT_NAME}} Onboarding  |  © 2025 Terianix.ai</a:t>
             </a:r>
             <a:endParaRPr lang="en-US" sz="750" dirty="0"/>
           </a:p>
@@ -13147,7 +13147,7 @@
                 <a:ea typeface="Calibri" pitchFamily="34" charset="-122"/>
                 <a:cs typeface="Calibri" pitchFamily="34" charset="-120"/>
               </a:rPr>
-              <a:t>Provided by: Terian Services</a:t>
+              <a:t>Provided by: Terianix.ai</a:t>
             </a:r>
             <a:endParaRPr lang="en-US" sz="1100" dirty="0"/>
           </a:p>
@@ -13427,7 +13427,7 @@
                 <a:ea typeface="Calibri" pitchFamily="34" charset="-122"/>
                 <a:cs typeface="Calibri" pitchFamily="34" charset="-120"/>
               </a:rPr>
-              <a:t>CONFIDENTIAL — {{CLIENT_NAME}} Onboarding  |  © 2025 Terian Services</a:t>
+              <a:t>CONFIDENTIAL — {{CLIENT_NAME}} Onboarding  |  © 2025 Terianix.ai</a:t>
             </a:r>
             <a:endParaRPr lang="en-US" sz="750" dirty="0"/>
           </a:p>
@@ -13549,7 +13549,7 @@
                 <a:ea typeface="Calibri" pitchFamily="34" charset="-122"/>
                 <a:cs typeface="Calibri" pitchFamily="34" charset="-120"/>
               </a:rPr>
-              <a:t>Provided by: Terian Services</a:t>
+              <a:t>Provided by: Terianix.ai</a:t>
             </a:r>
             <a:endParaRPr lang="en-US" sz="1100" dirty="0"/>
           </a:p>
@@ -13829,7 +13829,7 @@
                 <a:ea typeface="Calibri" pitchFamily="34" charset="-122"/>
                 <a:cs typeface="Calibri" pitchFamily="34" charset="-120"/>
               </a:rPr>
-              <a:t>CONFIDENTIAL — {{CLIENT_NAME}} Onboarding  |  © 2025 Terian Services</a:t>
+              <a:t>CONFIDENTIAL — {{CLIENT_NAME}} Onboarding  |  © 2025 Terianix.ai</a:t>
             </a:r>
             <a:endParaRPr lang="en-US" sz="750" dirty="0"/>
           </a:p>
@@ -13951,7 +13951,7 @@
                 <a:ea typeface="Calibri" pitchFamily="34" charset="-122"/>
                 <a:cs typeface="Calibri" pitchFamily="34" charset="-120"/>
               </a:rPr>
-              <a:t>Provided by: Terian Services</a:t>
+              <a:t>Provided by: Terianix.ai</a:t>
             </a:r>
             <a:endParaRPr lang="en-US" sz="1100" dirty="0"/>
           </a:p>
@@ -14231,7 +14231,7 @@
                 <a:ea typeface="Calibri" pitchFamily="34" charset="-122"/>
                 <a:cs typeface="Calibri" pitchFamily="34" charset="-120"/>
               </a:rPr>
-              <a:t>CONFIDENTIAL — {{CLIENT_NAME}} Onboarding  |  © 2025 Terian Services</a:t>
+              <a:t>CONFIDENTIAL — {{CLIENT_NAME}} Onboarding  |  © 2025 Terianix.ai</a:t>
             </a:r>
             <a:endParaRPr lang="en-US" sz="750" dirty="0"/>
           </a:p>
@@ -14326,7 +14326,7 @@
                 </a:solidFill>
                 <a:latin typeface="Calibri" pitchFamily="34" charset="0"/>
               </a:rPr>
-              <a:t>Provided by:  Terian Services</a:t>
+              <a:t>Provided by:  Terianix.ai</a:t>
             </a:r>
             <a:endParaRPr lang="en-US" sz="1000" dirty="0"/>
           </a:p>
@@ -15767,7 +15767,7 @@
                 </a:solidFill>
                 <a:latin typeface="Calibri" pitchFamily="34" charset="0"/>
               </a:rPr>
-              <a:t>Provided by:  Terian Services</a:t>
+              <a:t>Provided by:  Terianix.ai</a:t>
             </a:r>
           </a:p>
         </p:txBody>
@@ -15978,7 +15978,7 @@
                 </a:solidFill>
                 <a:latin typeface="Calibri" pitchFamily="34" charset="0"/>
               </a:rPr>
-              <a:t>Provided by:  Terian Services</a:t>
+              <a:t>Provided by:  Terianix.ai</a:t>
             </a:r>
           </a:p>
         </p:txBody>
@@ -17039,7 +17039,7 @@
                 </a:solidFill>
                 <a:latin typeface="Calibri" pitchFamily="34" charset="0"/>
               </a:rPr>
-              <a:t>Provided by:  Terian Services</a:t>
+              <a:t>Provided by:  Terianix.ai</a:t>
             </a:r>
           </a:p>
         </p:txBody>
@@ -17975,7 +17975,7 @@
                 <a:ea typeface="Calibri" pitchFamily="34" charset="-122"/>
                 <a:cs typeface="Calibri" pitchFamily="34" charset="-120"/>
               </a:rPr>
-              <a:t>Provided by:  Terian Services</a:t>
+              <a:t>Provided by:  Terianix.ai</a:t>
             </a:r>
             <a:endParaRPr lang="en-US" sz="1000" dirty="0"/>
           </a:p>
@@ -19297,7 +19297,7 @@
                 <a:ea typeface="Calibri" pitchFamily="34" charset="-122"/>
                 <a:cs typeface="Calibri" pitchFamily="34" charset="-120"/>
               </a:rPr>
-              <a:t>Provided by:  Terian Services</a:t>
+              <a:t>Provided by:  Terianix.ai</a:t>
             </a:r>
             <a:endParaRPr lang="en-US" sz="1000" dirty="0"/>
           </a:p>
@@ -20287,7 +20287,7 @@
                 <a:ea typeface="Calibri" pitchFamily="34" charset="-122"/>
                 <a:cs typeface="Calibri" pitchFamily="34" charset="-120"/>
               </a:rPr>
-              <a:t>Provided by:  Terian Services</a:t>
+              <a:t>Provided by:  Terianix.ai</a:t>
             </a:r>
             <a:endParaRPr lang="en-US" sz="1000" dirty="0"/>
           </a:p>
@@ -20535,7 +20535,7 @@
                 <a:ea typeface="Calibri" pitchFamily="34" charset="-122"/>
                 <a:cs typeface="Calibri" pitchFamily="34" charset="-120"/>
               </a:rPr>
-              <a:t>High nomination frequency  </a:t>
+              <a:t xml:space="preserve">High nomination frequency  </a:t>
             </a:r>
             <a:endParaRPr lang="en-US" sz="1100" dirty="0"/>
           </a:p>
@@ -20553,7 +20553,7 @@
                 <a:ea typeface="Calibri" pitchFamily="34" charset="-122"/>
                 <a:cs typeface="Calibri" pitchFamily="34" charset="-120"/>
               </a:rPr>
-              <a:t>Repeated beneficiary patterns  </a:t>
+              <a:t xml:space="preserve">Repeated beneficiary patterns  </a:t>
             </a:r>
             <a:endParaRPr lang="en-US" sz="1100" dirty="0"/>
           </a:p>
@@ -20571,7 +20571,7 @@
                 <a:ea typeface="Calibri" pitchFamily="34" charset="-122"/>
                 <a:cs typeface="Calibri" pitchFamily="34" charset="-120"/>
               </a:rPr>
-              <a:t>Circular / reciprocal schemes  </a:t>
+              <a:t xml:space="preserve">Circular / reciprocal schemes  </a:t>
             </a:r>
             <a:endParaRPr lang="en-US" sz="1100" dirty="0"/>
           </a:p>
@@ -20589,7 +20589,7 @@
                 <a:ea typeface="Calibri" pitchFamily="34" charset="-122"/>
                 <a:cs typeface="Calibri" pitchFamily="34" charset="-120"/>
               </a:rPr>
-              <a:t>Unusually high amounts (&gt; 2σ from baseline)  </a:t>
+              <a:t xml:space="preserve">Unusually high amounts (&gt; 2σ from baseline)  </a:t>
             </a:r>
             <a:endParaRPr lang="en-US" sz="1100" dirty="0"/>
           </a:p>
@@ -20607,7 +20607,7 @@
                 <a:ea typeface="Calibri" pitchFamily="34" charset="-122"/>
                 <a:cs typeface="Calibri" pitchFamily="34" charset="-120"/>
               </a:rPr>
-              <a:t>Rapid approvals (&lt; 1 hour)  </a:t>
+              <a:t xml:space="preserve">Rapid approvals (&lt; 1 hour)  </a:t>
             </a:r>
             <a:endParaRPr lang="en-US" sz="1100" dirty="0"/>
           </a:p>
@@ -20625,7 +20625,7 @@
                 <a:ea typeface="Calibri" pitchFamily="34" charset="-122"/>
                 <a:cs typeface="Calibri" pitchFamily="34" charset="-120"/>
               </a:rPr>
-              <a:t>Self-dealing network detection  </a:t>
+              <a:t xml:space="preserve">Self-dealing network detection  </a:t>
             </a:r>
             <a:endParaRPr lang="en-US" sz="1100" dirty="0"/>
           </a:p>
@@ -21400,7 +21400,7 @@
                 <a:ea typeface="Calibri" pitchFamily="34" charset="-122"/>
                 <a:cs typeface="Calibri" pitchFamily="34" charset="-120"/>
               </a:rPr>
-              <a:t>Provided by:  Terian Services</a:t>
+              <a:t>Provided by:  Terianix.ai</a:t>
             </a:r>
             <a:endParaRPr lang="en-US" sz="1000" dirty="0"/>
           </a:p>
@@ -22296,7 +22296,7 @@
                 <a:ea typeface="Calibri" pitchFamily="34" charset="-122"/>
                 <a:cs typeface="Calibri" pitchFamily="34" charset="-120"/>
               </a:rPr>
-              <a:t>Provided by:  Terian Services</a:t>
+              <a:t>Provided by:  Terianix.ai</a:t>
             </a:r>
             <a:endParaRPr lang="en-US" sz="1000" dirty="0"/>
           </a:p>
@@ -23039,7 +23039,7 @@
                 <a:ea typeface="Calibri" pitchFamily="34" charset="-122"/>
                 <a:cs typeface="Calibri" pitchFamily="34" charset="-120"/>
               </a:rPr>
-              <a:t>Provided by:  Terian Services</a:t>
+              <a:t>Provided by:  Terianix.ai</a:t>
             </a:r>
             <a:endParaRPr lang="en-US" sz="1000" dirty="0"/>
           </a:p>
@@ -23350,7 +23350,7 @@
                 <a:ea typeface="Calibri" pitchFamily="34" charset="-122"/>
                 <a:cs typeface="Calibri" pitchFamily="34" charset="-120"/>
               </a:rPr>
-              <a:t>{{CLIENT_SUBDOMAIN}}.terian-services.com</a:t>
+              <a:t>{{CLIENT_SUBDOMAIN}}-awards.terianix.ai</a:t>
             </a:r>
             <a:endParaRPr lang="en-US" sz="1050" dirty="0"/>
           </a:p>
@@ -23428,7 +23428,7 @@
                 <a:ea typeface="Calibri" pitchFamily="34" charset="-122"/>
                 <a:cs typeface="Calibri" pitchFamily="34" charset="-120"/>
               </a:rPr>
-              <a:t>{{CLIENT_SUBDOMAIN}}.onmicrosoft.com</a:t>
+              <a:t>{{CLIENT_SUBDOMAIN}}-terianix.onmicrosoft.com</a:t>
             </a:r>
             <a:endParaRPr lang="en-US" sz="1050" dirty="0"/>
           </a:p>
@@ -23920,7 +23920,7 @@
                 <a:ea typeface="Calibri" pitchFamily="34" charset="-122"/>
                 <a:cs typeface="Calibri" pitchFamily="34" charset="-120"/>
               </a:rPr>
-              <a:t>Your own subdomain under terian-services.com from day one.</a:t>
+              <a:t>Your own subdomain under terianix.ai from day one.</a:t>
             </a:r>
             <a:endParaRPr lang="en-US" sz="950" dirty="0"/>
           </a:p>
@@ -24407,7 +24407,7 @@
                 <a:ea typeface="Calibri" pitchFamily="34" charset="-122"/>
                 <a:cs typeface="Calibri" pitchFamily="34" charset="-120"/>
               </a:rPr>
-              <a:t>Provided by:  Terian Services</a:t>
+              <a:t>Provided by:  Terianix.ai</a:t>
             </a:r>
             <a:endParaRPr lang="en-US" sz="1000" dirty="0"/>
           </a:p>

--- a/blob_templates/award_nomination_onboarding_template.pptx
+++ b/blob_templates/award_nomination_onboarding_template.pptx
@@ -15921,7 +15921,6 @@
           <a:chExt cx="0" cy="0"/>
         </a:xfrm>
       </p:grpSpPr>
-      <!-- Header bar -->
       <p:sp>
         <p:nvSpPr>
           <p:cNvPr id="2" name="HeaderBar"/>
@@ -16982,7 +16981,6 @@
           <a:chExt cx="0" cy="0"/>
         </a:xfrm>
       </p:grpSpPr>
-      <!-- Header bar -->
       <p:sp>
         <p:nvSpPr>
           <p:cNvPr id="2" name="HeaderBar"/>
@@ -23790,7 +23788,7 @@
                 <a:ea typeface="Calibri" pitchFamily="34" charset="-122"/>
                 <a:cs typeface="Calibri" pitchFamily="34" charset="-120"/>
               </a:rPr>
-              <a:t>AWard_Nomination_Admin + Employee</a:t>
+              <a:t>Award_Nomination_Admin + Employee + HRBP</a:t>
             </a:r>
             <a:endParaRPr lang="en-US" sz="1050" dirty="0"/>
           </a:p>
